--- a/AgriAI360_Phase2_Presentation.pptx
+++ b/AgriAI360_Phase2_Presentation.pptx
@@ -23,6 +23,8 @@
     <p:sldId id="271" r:id="rId22"/>
     <p:sldId id="272" r:id="rId23"/>
     <p:sldId id="273" r:id="rId24"/>
+    <p:sldId id="274" r:id="rId25"/>
+    <p:sldId id="275" r:id="rId26"/>
   </p:sldIdLst>
   <p:sldSz cx="12191695" cy="6858000" type="screen4x3"/>
   <p:notesSz cx="6858000" cy="9144000"/>
@@ -13229,7 +13231,7 @@
             <a:avLst/>
           </a:prstGeom>
           <a:solidFill>
-            <a:srgbClr val="0A1A13"/>
+            <a:srgbClr val="F6F9F6"/>
           </a:solidFill>
           <a:ln>
             <a:noFill/>
@@ -13273,7 +13275,7 @@
             <a:avLst/>
           </a:prstGeom>
           <a:solidFill>
-            <a:srgbClr val="66BB6A"/>
+            <a:srgbClr val="2E7D32"/>
           </a:solidFill>
           <a:ln>
             <a:noFill/>
@@ -13338,11 +13340,11 @@
             <a:r>
               <a:rPr sz="1250" b="1" i="0">
                 <a:solidFill>
-                  <a:srgbClr val="66BB6A"/>
-                </a:solidFill>
-                <a:latin typeface="Calibri"/>
-              </a:rPr>
-              <a:t>CONCLUSION</a:t>
+                  <a:srgbClr val="2E7D32"/>
+                </a:solidFill>
+                <a:latin typeface="Calibri"/>
+              </a:rPr>
+              <a:t>SYSTEM OVERVIEW</a:t>
             </a:r>
           </a:p>
         </p:txBody>
@@ -13383,25 +13385,70 @@
             <a:r>
               <a:rPr sz="3200" b="1" i="0">
                 <a:solidFill>
-                  <a:srgbClr val="FFFFFF"/>
-                </a:solidFill>
-                <a:latin typeface="Calibri"/>
-              </a:rPr>
-              <a:t>Summary &amp; Path Forward</a:t>
-            </a:r>
-          </a:p>
-        </p:txBody>
-      </p:sp>
-      <p:sp>
-        <p:nvSpPr>
-          <p:cNvPr id="6" name="Rounded Rectangle 5"/>
+                  <a:srgbClr val="121B15"/>
+                </a:solidFill>
+                <a:latin typeface="Calibri"/>
+              </a:rPr>
+              <a:t>AgriAI 360 – System Workflow</a:t>
+            </a:r>
+          </a:p>
+        </p:txBody>
+      </p:sp>
+      <p:sp>
+        <p:nvSpPr>
+          <p:cNvPr id="6" name="TextBox 5"/>
+          <p:cNvSpPr txBox="1"/>
+          <p:nvPr/>
+        </p:nvSpPr>
+        <p:spPr>
+          <a:xfrm>
+            <a:off x="658368" y="1463040"/>
+            <a:ext cx="10881360" cy="1097280"/>
+          </a:xfrm>
+          <a:prstGeom prst="rect">
+            <a:avLst/>
+          </a:prstGeom>
+          <a:noFill/>
+        </p:spPr>
+        <p:txBody>
+          <a:bodyPr wrap="square" lIns="0" rIns="0" tIns="0" bIns="0">
+            <a:spAutoFit/>
+          </a:bodyPr>
+          <a:lstStyle/>
+          <a:p>
+            <a:pPr algn="l">
+              <a:lnSpc>
+                <a:spcPct val="112000"/>
+              </a:lnSpc>
+              <a:spcBef>
+                <a:spcPts val="0"/>
+              </a:spcBef>
+              <a:spcAft>
+                <a:spcPts val="200"/>
+              </a:spcAft>
+            </a:pPr>
+            <a:r>
+              <a:rPr sz="1400" b="0" i="1">
+                <a:solidFill>
+                  <a:srgbClr val="4A5A50"/>
+                </a:solidFill>
+                <a:latin typeface="Calibri"/>
+              </a:rPr>
+              <a:t>An integrated AI-based platform supporting farmers in crop and farm-management decisions.</a:t>
+            </a:r>
+          </a:p>
+        </p:txBody>
+      </p:sp>
+      <p:sp>
+        <p:nvSpPr>
+          <p:cNvPr id="7" name="Rounded Rectangle 6"/>
           <p:cNvSpPr/>
           <p:nvPr/>
         </p:nvSpPr>
         <p:spPr>
           <a:xfrm>
-            <a:off x="658368" y="1600200"/>
-            <a:ext cx="1022299" cy="685800"/>
+            <a:off x="1051560" y="2514600"/>
+            <a:ext cx="1901952" cy="658368"/>
           </a:xfrm>
           <a:prstGeom prst="roundRect">
             <a:avLst>
@@ -13409,7 +13456,7 @@
             </a:avLst>
           </a:prstGeom>
           <a:solidFill>
-            <a:srgbClr val="2E5A3C"/>
+            <a:srgbClr val="295333"/>
           </a:solidFill>
           <a:ln>
             <a:noFill/>
@@ -13446,27 +13493,72 @@
               </a:spcAft>
             </a:pPr>
             <a:r>
-              <a:rPr sz="950" b="1" i="0">
+              <a:rPr sz="1200" b="1" i="0">
                 <a:solidFill>
                   <a:srgbClr val="FFFFFF"/>
                 </a:solidFill>
                 <a:latin typeface="Calibri"/>
               </a:rPr>
-              <a:t>Phase 1</a:t>
-            </a:r>
-          </a:p>
-        </p:txBody>
-      </p:sp>
-      <p:sp>
-        <p:nvSpPr>
-          <p:cNvPr id="7" name="Rounded Rectangle 6"/>
+              <a:t>Login</a:t>
+            </a:r>
+          </a:p>
+        </p:txBody>
+      </p:sp>
+      <p:sp>
+        <p:nvSpPr>
+          <p:cNvPr id="8" name="TextBox 7"/>
+          <p:cNvSpPr txBox="1"/>
+          <p:nvPr/>
+        </p:nvSpPr>
+        <p:spPr>
+          <a:xfrm>
+            <a:off x="2953512" y="2514600"/>
+            <a:ext cx="146304" cy="658368"/>
+          </a:xfrm>
+          <a:prstGeom prst="rect">
+            <a:avLst/>
+          </a:prstGeom>
+          <a:noFill/>
+        </p:spPr>
+        <p:txBody>
+          <a:bodyPr wrap="square" lIns="0" rIns="0" tIns="0" bIns="0" anchor="ctr">
+            <a:spAutoFit/>
+          </a:bodyPr>
+          <a:lstStyle/>
+          <a:p>
+            <a:pPr algn="ctr">
+              <a:lnSpc>
+                <a:spcPct val="112000"/>
+              </a:lnSpc>
+              <a:spcBef>
+                <a:spcPts val="0"/>
+              </a:spcBef>
+              <a:spcAft>
+                <a:spcPts val="200"/>
+              </a:spcAft>
+            </a:pPr>
+            <a:r>
+              <a:rPr sz="1600" b="1" i="0">
+                <a:solidFill>
+                  <a:srgbClr val="2E7D32"/>
+                </a:solidFill>
+                <a:latin typeface="Calibri"/>
+              </a:rPr>
+              <a:t>→</a:t>
+            </a:r>
+          </a:p>
+        </p:txBody>
+      </p:sp>
+      <p:sp>
+        <p:nvSpPr>
+          <p:cNvPr id="9" name="Rounded Rectangle 8"/>
           <p:cNvSpPr/>
           <p:nvPr/>
         </p:nvSpPr>
         <p:spPr>
           <a:xfrm>
-            <a:off x="1753819" y="1600200"/>
-            <a:ext cx="1022299" cy="685800"/>
+            <a:off x="3099816" y="2514600"/>
+            <a:ext cx="1901952" cy="658368"/>
           </a:xfrm>
           <a:prstGeom prst="roundRect">
             <a:avLst>
@@ -13474,7 +13566,7 @@
             </a:avLst>
           </a:prstGeom>
           <a:solidFill>
-            <a:srgbClr val="172F1F"/>
+            <a:srgbClr val="295333"/>
           </a:solidFill>
           <a:ln>
             <a:noFill/>
@@ -13511,27 +13603,72 @@
               </a:spcAft>
             </a:pPr>
             <a:r>
-              <a:rPr sz="950" b="1" i="0">
+              <a:rPr sz="1200" b="1" i="0">
                 <a:solidFill>
                   <a:srgbClr val="FFFFFF"/>
                 </a:solidFill>
                 <a:latin typeface="Calibri"/>
               </a:rPr>
-              <a:t>Recommendation</a:t>
-            </a:r>
-          </a:p>
-        </p:txBody>
-      </p:sp>
-      <p:sp>
-        <p:nvSpPr>
-          <p:cNvPr id="8" name="Rounded Rectangle 7"/>
+              <a:t>Farm Setup</a:t>
+            </a:r>
+          </a:p>
+        </p:txBody>
+      </p:sp>
+      <p:sp>
+        <p:nvSpPr>
+          <p:cNvPr id="10" name="TextBox 9"/>
+          <p:cNvSpPr txBox="1"/>
+          <p:nvPr/>
+        </p:nvSpPr>
+        <p:spPr>
+          <a:xfrm>
+            <a:off x="5001768" y="2514600"/>
+            <a:ext cx="146304" cy="658368"/>
+          </a:xfrm>
+          <a:prstGeom prst="rect">
+            <a:avLst/>
+          </a:prstGeom>
+          <a:noFill/>
+        </p:spPr>
+        <p:txBody>
+          <a:bodyPr wrap="square" lIns="0" rIns="0" tIns="0" bIns="0" anchor="ctr">
+            <a:spAutoFit/>
+          </a:bodyPr>
+          <a:lstStyle/>
+          <a:p>
+            <a:pPr algn="ctr">
+              <a:lnSpc>
+                <a:spcPct val="112000"/>
+              </a:lnSpc>
+              <a:spcBef>
+                <a:spcPts val="0"/>
+              </a:spcBef>
+              <a:spcAft>
+                <a:spcPts val="200"/>
+              </a:spcAft>
+            </a:pPr>
+            <a:r>
+              <a:rPr sz="1600" b="1" i="0">
+                <a:solidFill>
+                  <a:srgbClr val="2E7D32"/>
+                </a:solidFill>
+                <a:latin typeface="Calibri"/>
+              </a:rPr>
+              <a:t>→</a:t>
+            </a:r>
+          </a:p>
+        </p:txBody>
+      </p:sp>
+      <p:sp>
+        <p:nvSpPr>
+          <p:cNvPr id="11" name="Rounded Rectangle 10"/>
           <p:cNvSpPr/>
           <p:nvPr/>
         </p:nvSpPr>
         <p:spPr>
           <a:xfrm>
-            <a:off x="2849270" y="1600200"/>
-            <a:ext cx="1022299" cy="685800"/>
+            <a:off x="5148072" y="2514600"/>
+            <a:ext cx="1901952" cy="658368"/>
           </a:xfrm>
           <a:prstGeom prst="roundRect">
             <a:avLst>
@@ -13539,7 +13676,7 @@
             </a:avLst>
           </a:prstGeom>
           <a:solidFill>
-            <a:srgbClr val="172F1F"/>
+            <a:srgbClr val="295333"/>
           </a:solidFill>
           <a:ln>
             <a:noFill/>
@@ -13576,27 +13713,72 @@
               </a:spcAft>
             </a:pPr>
             <a:r>
-              <a:rPr sz="950" b="1" i="0">
+              <a:rPr sz="1200" b="1" i="0">
                 <a:solidFill>
                   <a:srgbClr val="FFFFFF"/>
                 </a:solidFill>
                 <a:latin typeface="Calibri"/>
               </a:rPr>
-              <a:t>Yield &amp; Profit</a:t>
-            </a:r>
-          </a:p>
-        </p:txBody>
-      </p:sp>
-      <p:sp>
-        <p:nvSpPr>
-          <p:cNvPr id="9" name="Rounded Rectangle 8"/>
+              <a:t>Soil Analysis</a:t>
+            </a:r>
+          </a:p>
+        </p:txBody>
+      </p:sp>
+      <p:sp>
+        <p:nvSpPr>
+          <p:cNvPr id="12" name="TextBox 11"/>
+          <p:cNvSpPr txBox="1"/>
+          <p:nvPr/>
+        </p:nvSpPr>
+        <p:spPr>
+          <a:xfrm>
+            <a:off x="7050024" y="2514600"/>
+            <a:ext cx="146304" cy="658368"/>
+          </a:xfrm>
+          <a:prstGeom prst="rect">
+            <a:avLst/>
+          </a:prstGeom>
+          <a:noFill/>
+        </p:spPr>
+        <p:txBody>
+          <a:bodyPr wrap="square" lIns="0" rIns="0" tIns="0" bIns="0" anchor="ctr">
+            <a:spAutoFit/>
+          </a:bodyPr>
+          <a:lstStyle/>
+          <a:p>
+            <a:pPr algn="ctr">
+              <a:lnSpc>
+                <a:spcPct val="112000"/>
+              </a:lnSpc>
+              <a:spcBef>
+                <a:spcPts val="0"/>
+              </a:spcBef>
+              <a:spcAft>
+                <a:spcPts val="200"/>
+              </a:spcAft>
+            </a:pPr>
+            <a:r>
+              <a:rPr sz="1600" b="1" i="0">
+                <a:solidFill>
+                  <a:srgbClr val="2E7D32"/>
+                </a:solidFill>
+                <a:latin typeface="Calibri"/>
+              </a:rPr>
+              <a:t>→</a:t>
+            </a:r>
+          </a:p>
+        </p:txBody>
+      </p:sp>
+      <p:sp>
+        <p:nvSpPr>
+          <p:cNvPr id="13" name="Rounded Rectangle 12"/>
           <p:cNvSpPr/>
           <p:nvPr/>
         </p:nvSpPr>
         <p:spPr>
           <a:xfrm>
-            <a:off x="3944721" y="1600200"/>
-            <a:ext cx="1022299" cy="685800"/>
+            <a:off x="7196328" y="2514600"/>
+            <a:ext cx="1901952" cy="658368"/>
           </a:xfrm>
           <a:prstGeom prst="roundRect">
             <a:avLst>
@@ -13604,7 +13786,7 @@
             </a:avLst>
           </a:prstGeom>
           <a:solidFill>
-            <a:srgbClr val="172F1F"/>
+            <a:srgbClr val="295333"/>
           </a:solidFill>
           <a:ln>
             <a:noFill/>
@@ -13641,27 +13823,72 @@
               </a:spcAft>
             </a:pPr>
             <a:r>
-              <a:rPr sz="950" b="1" i="0">
+              <a:rPr sz="1200" b="1" i="0">
                 <a:solidFill>
                   <a:srgbClr val="FFFFFF"/>
                 </a:solidFill>
                 <a:latin typeface="Calibri"/>
               </a:rPr>
-              <a:t>Water &amp; Risk</a:t>
-            </a:r>
-          </a:p>
-        </p:txBody>
-      </p:sp>
-      <p:sp>
-        <p:nvSpPr>
-          <p:cNvPr id="10" name="Rounded Rectangle 9"/>
+              <a:t>Crop Recommendation</a:t>
+            </a:r>
+          </a:p>
+        </p:txBody>
+      </p:sp>
+      <p:sp>
+        <p:nvSpPr>
+          <p:cNvPr id="14" name="TextBox 13"/>
+          <p:cNvSpPr txBox="1"/>
+          <p:nvPr/>
+        </p:nvSpPr>
+        <p:spPr>
+          <a:xfrm>
+            <a:off x="9098280" y="2514600"/>
+            <a:ext cx="146304" cy="658368"/>
+          </a:xfrm>
+          <a:prstGeom prst="rect">
+            <a:avLst/>
+          </a:prstGeom>
+          <a:noFill/>
+        </p:spPr>
+        <p:txBody>
+          <a:bodyPr wrap="square" lIns="0" rIns="0" tIns="0" bIns="0" anchor="ctr">
+            <a:spAutoFit/>
+          </a:bodyPr>
+          <a:lstStyle/>
+          <a:p>
+            <a:pPr algn="ctr">
+              <a:lnSpc>
+                <a:spcPct val="112000"/>
+              </a:lnSpc>
+              <a:spcBef>
+                <a:spcPts val="0"/>
+              </a:spcBef>
+              <a:spcAft>
+                <a:spcPts val="200"/>
+              </a:spcAft>
+            </a:pPr>
+            <a:r>
+              <a:rPr sz="1600" b="1" i="0">
+                <a:solidFill>
+                  <a:srgbClr val="2E7D32"/>
+                </a:solidFill>
+                <a:latin typeface="Calibri"/>
+              </a:rPr>
+              <a:t>→</a:t>
+            </a:r>
+          </a:p>
+        </p:txBody>
+      </p:sp>
+      <p:sp>
+        <p:nvSpPr>
+          <p:cNvPr id="15" name="Rounded Rectangle 14"/>
           <p:cNvSpPr/>
           <p:nvPr/>
         </p:nvSpPr>
         <p:spPr>
           <a:xfrm>
-            <a:off x="5040172" y="1600200"/>
-            <a:ext cx="1022299" cy="685800"/>
+            <a:off x="9244584" y="2514600"/>
+            <a:ext cx="1901952" cy="658368"/>
           </a:xfrm>
           <a:prstGeom prst="roundRect">
             <a:avLst>
@@ -13669,7 +13896,7 @@
             </a:avLst>
           </a:prstGeom>
           <a:solidFill>
-            <a:srgbClr val="172F1F"/>
+            <a:srgbClr val="295333"/>
           </a:solidFill>
           <a:ln>
             <a:noFill/>
@@ -13706,7 +13933,7 @@
               </a:spcAft>
             </a:pPr>
             <a:r>
-              <a:rPr sz="950" b="1" i="0">
+              <a:rPr sz="1200" b="1" i="0">
                 <a:solidFill>
                   <a:srgbClr val="FFFFFF"/>
                 </a:solidFill>
@@ -13719,14 +13946,59 @@
       </p:sp>
       <p:sp>
         <p:nvSpPr>
-          <p:cNvPr id="11" name="Rounded Rectangle 10"/>
+          <p:cNvPr id="16" name="TextBox 15"/>
+          <p:cNvSpPr txBox="1"/>
+          <p:nvPr/>
+        </p:nvSpPr>
+        <p:spPr>
+          <a:xfrm>
+            <a:off x="658368" y="3291840"/>
+            <a:ext cx="10881360" cy="320040"/>
+          </a:xfrm>
+          <a:prstGeom prst="rect">
+            <a:avLst/>
+          </a:prstGeom>
+          <a:noFill/>
+        </p:spPr>
+        <p:txBody>
+          <a:bodyPr wrap="square" lIns="0" rIns="0" tIns="0" bIns="0">
+            <a:spAutoFit/>
+          </a:bodyPr>
+          <a:lstStyle/>
+          <a:p>
+            <a:pPr algn="ctr">
+              <a:lnSpc>
+                <a:spcPct val="112000"/>
+              </a:lnSpc>
+              <a:spcBef>
+                <a:spcPts val="0"/>
+              </a:spcBef>
+              <a:spcAft>
+                <a:spcPts val="200"/>
+              </a:spcAft>
+            </a:pPr>
+            <a:r>
+              <a:rPr sz="1800" b="1" i="0">
+                <a:solidFill>
+                  <a:srgbClr val="2E7D32"/>
+                </a:solidFill>
+                <a:latin typeface="Calibri"/>
+              </a:rPr>
+              <a:t>↓</a:t>
+            </a:r>
+          </a:p>
+        </p:txBody>
+      </p:sp>
+      <p:sp>
+        <p:nvSpPr>
+          <p:cNvPr id="17" name="Rounded Rectangle 16"/>
           <p:cNvSpPr/>
           <p:nvPr/>
         </p:nvSpPr>
         <p:spPr>
           <a:xfrm>
-            <a:off x="6135624" y="1600200"/>
-            <a:ext cx="1022299" cy="685800"/>
+            <a:off x="1051560" y="3703320"/>
+            <a:ext cx="1901952" cy="658368"/>
           </a:xfrm>
           <a:prstGeom prst="roundRect">
             <a:avLst>
@@ -13734,7 +14006,7 @@
             </a:avLst>
           </a:prstGeom>
           <a:solidFill>
-            <a:srgbClr val="172F1F"/>
+            <a:srgbClr val="295333"/>
           </a:solidFill>
           <a:ln>
             <a:noFill/>
@@ -13771,27 +14043,72 @@
               </a:spcAft>
             </a:pPr>
             <a:r>
-              <a:rPr sz="950" b="1" i="0">
+              <a:rPr sz="1200" b="1" i="0">
                 <a:solidFill>
                   <a:srgbClr val="FFFFFF"/>
                 </a:solidFill>
                 <a:latin typeface="Calibri"/>
               </a:rPr>
-              <a:t>Fertilizer &amp; Market</a:t>
-            </a:r>
-          </a:p>
-        </p:txBody>
-      </p:sp>
-      <p:sp>
-        <p:nvSpPr>
-          <p:cNvPr id="12" name="Rounded Rectangle 11"/>
+              <a:t>Weather</a:t>
+            </a:r>
+          </a:p>
+        </p:txBody>
+      </p:sp>
+      <p:sp>
+        <p:nvSpPr>
+          <p:cNvPr id="18" name="TextBox 17"/>
+          <p:cNvSpPr txBox="1"/>
+          <p:nvPr/>
+        </p:nvSpPr>
+        <p:spPr>
+          <a:xfrm>
+            <a:off x="2953512" y="3703320"/>
+            <a:ext cx="146304" cy="658368"/>
+          </a:xfrm>
+          <a:prstGeom prst="rect">
+            <a:avLst/>
+          </a:prstGeom>
+          <a:noFill/>
+        </p:spPr>
+        <p:txBody>
+          <a:bodyPr wrap="square" lIns="0" rIns="0" tIns="0" bIns="0" anchor="ctr">
+            <a:spAutoFit/>
+          </a:bodyPr>
+          <a:lstStyle/>
+          <a:p>
+            <a:pPr algn="ctr">
+              <a:lnSpc>
+                <a:spcPct val="112000"/>
+              </a:lnSpc>
+              <a:spcBef>
+                <a:spcPts val="0"/>
+              </a:spcBef>
+              <a:spcAft>
+                <a:spcPts val="200"/>
+              </a:spcAft>
+            </a:pPr>
+            <a:r>
+              <a:rPr sz="1600" b="1" i="0">
+                <a:solidFill>
+                  <a:srgbClr val="2E7D32"/>
+                </a:solidFill>
+                <a:latin typeface="Calibri"/>
+              </a:rPr>
+              <a:t>→</a:t>
+            </a:r>
+          </a:p>
+        </p:txBody>
+      </p:sp>
+      <p:sp>
+        <p:nvSpPr>
+          <p:cNvPr id="19" name="Rounded Rectangle 18"/>
           <p:cNvSpPr/>
           <p:nvPr/>
         </p:nvSpPr>
         <p:spPr>
           <a:xfrm>
-            <a:off x="7231075" y="1600200"/>
-            <a:ext cx="1022299" cy="685800"/>
+            <a:off x="3099816" y="3703320"/>
+            <a:ext cx="1901952" cy="658368"/>
           </a:xfrm>
           <a:prstGeom prst="roundRect">
             <a:avLst>
@@ -13799,7 +14116,7 @@
             </a:avLst>
           </a:prstGeom>
           <a:solidFill>
-            <a:srgbClr val="172F1F"/>
+            <a:srgbClr val="295333"/>
           </a:solidFill>
           <a:ln>
             <a:noFill/>
@@ -13836,27 +14153,72 @@
               </a:spcAft>
             </a:pPr>
             <a:r>
-              <a:rPr sz="950" b="1" i="0">
+              <a:rPr sz="1200" b="1" i="0">
                 <a:solidFill>
                   <a:srgbClr val="FFFFFF"/>
                 </a:solidFill>
                 <a:latin typeface="Calibri"/>
               </a:rPr>
-              <a:t>Notifications</a:t>
-            </a:r>
-          </a:p>
-        </p:txBody>
-      </p:sp>
-      <p:sp>
-        <p:nvSpPr>
-          <p:cNvPr id="13" name="Rounded Rectangle 12"/>
+              <a:t>Water Requirement</a:t>
+            </a:r>
+          </a:p>
+        </p:txBody>
+      </p:sp>
+      <p:sp>
+        <p:nvSpPr>
+          <p:cNvPr id="20" name="TextBox 19"/>
+          <p:cNvSpPr txBox="1"/>
+          <p:nvPr/>
+        </p:nvSpPr>
+        <p:spPr>
+          <a:xfrm>
+            <a:off x="5001768" y="3703320"/>
+            <a:ext cx="146304" cy="658368"/>
+          </a:xfrm>
+          <a:prstGeom prst="rect">
+            <a:avLst/>
+          </a:prstGeom>
+          <a:noFill/>
+        </p:spPr>
+        <p:txBody>
+          <a:bodyPr wrap="square" lIns="0" rIns="0" tIns="0" bIns="0" anchor="ctr">
+            <a:spAutoFit/>
+          </a:bodyPr>
+          <a:lstStyle/>
+          <a:p>
+            <a:pPr algn="ctr">
+              <a:lnSpc>
+                <a:spcPct val="112000"/>
+              </a:lnSpc>
+              <a:spcBef>
+                <a:spcPts val="0"/>
+              </a:spcBef>
+              <a:spcAft>
+                <a:spcPts val="200"/>
+              </a:spcAft>
+            </a:pPr>
+            <a:r>
+              <a:rPr sz="1600" b="1" i="0">
+                <a:solidFill>
+                  <a:srgbClr val="2E7D32"/>
+                </a:solidFill>
+                <a:latin typeface="Calibri"/>
+              </a:rPr>
+              <a:t>→</a:t>
+            </a:r>
+          </a:p>
+        </p:txBody>
+      </p:sp>
+      <p:sp>
+        <p:nvSpPr>
+          <p:cNvPr id="21" name="Rounded Rectangle 20"/>
           <p:cNvSpPr/>
           <p:nvPr/>
         </p:nvSpPr>
         <p:spPr>
           <a:xfrm>
-            <a:off x="8326526" y="1600200"/>
-            <a:ext cx="1022299" cy="685800"/>
+            <a:off x="5148072" y="3703320"/>
+            <a:ext cx="1901952" cy="658368"/>
           </a:xfrm>
           <a:prstGeom prst="roundRect">
             <a:avLst>
@@ -13864,7 +14226,7 @@
             </a:avLst>
           </a:prstGeom>
           <a:solidFill>
-            <a:srgbClr val="172F1F"/>
+            <a:srgbClr val="295333"/>
           </a:solidFill>
           <a:ln>
             <a:noFill/>
@@ -13901,27 +14263,72 @@
               </a:spcAft>
             </a:pPr>
             <a:r>
-              <a:rPr sz="950" b="1" i="0">
+              <a:rPr sz="1200" b="1" i="0">
                 <a:solidFill>
                   <a:srgbClr val="FFFFFF"/>
                 </a:solidFill>
                 <a:latin typeface="Calibri"/>
               </a:rPr>
-              <a:t>AI Assistant</a:t>
-            </a:r>
-          </a:p>
-        </p:txBody>
-      </p:sp>
-      <p:sp>
-        <p:nvSpPr>
-          <p:cNvPr id="14" name="Rounded Rectangle 13"/>
+              <a:t>Market &amp; Profit</a:t>
+            </a:r>
+          </a:p>
+        </p:txBody>
+      </p:sp>
+      <p:sp>
+        <p:nvSpPr>
+          <p:cNvPr id="22" name="TextBox 21"/>
+          <p:cNvSpPr txBox="1"/>
+          <p:nvPr/>
+        </p:nvSpPr>
+        <p:spPr>
+          <a:xfrm>
+            <a:off x="7050024" y="3703320"/>
+            <a:ext cx="146304" cy="658368"/>
+          </a:xfrm>
+          <a:prstGeom prst="rect">
+            <a:avLst/>
+          </a:prstGeom>
+          <a:noFill/>
+        </p:spPr>
+        <p:txBody>
+          <a:bodyPr wrap="square" lIns="0" rIns="0" tIns="0" bIns="0" anchor="ctr">
+            <a:spAutoFit/>
+          </a:bodyPr>
+          <a:lstStyle/>
+          <a:p>
+            <a:pPr algn="ctr">
+              <a:lnSpc>
+                <a:spcPct val="112000"/>
+              </a:lnSpc>
+              <a:spcBef>
+                <a:spcPts val="0"/>
+              </a:spcBef>
+              <a:spcAft>
+                <a:spcPts val="200"/>
+              </a:spcAft>
+            </a:pPr>
+            <a:r>
+              <a:rPr sz="1600" b="1" i="0">
+                <a:solidFill>
+                  <a:srgbClr val="2E7D32"/>
+                </a:solidFill>
+                <a:latin typeface="Calibri"/>
+              </a:rPr>
+              <a:t>→</a:t>
+            </a:r>
+          </a:p>
+        </p:txBody>
+      </p:sp>
+      <p:sp>
+        <p:nvSpPr>
+          <p:cNvPr id="23" name="Rounded Rectangle 22"/>
           <p:cNvSpPr/>
           <p:nvPr/>
         </p:nvSpPr>
         <p:spPr>
           <a:xfrm>
-            <a:off x="9421977" y="1600200"/>
-            <a:ext cx="1022299" cy="685800"/>
+            <a:off x="7196328" y="3703320"/>
+            <a:ext cx="1901952" cy="658368"/>
           </a:xfrm>
           <a:prstGeom prst="roundRect">
             <a:avLst>
@@ -13929,7 +14336,7 @@
             </a:avLst>
           </a:prstGeom>
           <a:solidFill>
-            <a:srgbClr val="172F1F"/>
+            <a:srgbClr val="295333"/>
           </a:solidFill>
           <a:ln>
             <a:noFill/>
@@ -13966,27 +14373,72 @@
               </a:spcAft>
             </a:pPr>
             <a:r>
-              <a:rPr sz="950" b="1" i="0">
+              <a:rPr sz="1200" b="1" i="0">
                 <a:solidFill>
                   <a:srgbClr val="FFFFFF"/>
                 </a:solidFill>
                 <a:latin typeface="Calibri"/>
               </a:rPr>
-              <a:t>Real-Time</a:t>
-            </a:r>
-          </a:p>
-        </p:txBody>
-      </p:sp>
-      <p:sp>
-        <p:nvSpPr>
-          <p:cNvPr id="15" name="Rounded Rectangle 14"/>
+              <a:t>Notifications</a:t>
+            </a:r>
+          </a:p>
+        </p:txBody>
+      </p:sp>
+      <p:sp>
+        <p:nvSpPr>
+          <p:cNvPr id="24" name="TextBox 23"/>
+          <p:cNvSpPr txBox="1"/>
+          <p:nvPr/>
+        </p:nvSpPr>
+        <p:spPr>
+          <a:xfrm>
+            <a:off x="9098280" y="3703320"/>
+            <a:ext cx="146304" cy="658368"/>
+          </a:xfrm>
+          <a:prstGeom prst="rect">
+            <a:avLst/>
+          </a:prstGeom>
+          <a:noFill/>
+        </p:spPr>
+        <p:txBody>
+          <a:bodyPr wrap="square" lIns="0" rIns="0" tIns="0" bIns="0" anchor="ctr">
+            <a:spAutoFit/>
+          </a:bodyPr>
+          <a:lstStyle/>
+          <a:p>
+            <a:pPr algn="ctr">
+              <a:lnSpc>
+                <a:spcPct val="112000"/>
+              </a:lnSpc>
+              <a:spcBef>
+                <a:spcPts val="0"/>
+              </a:spcBef>
+              <a:spcAft>
+                <a:spcPts val="200"/>
+              </a:spcAft>
+            </a:pPr>
+            <a:r>
+              <a:rPr sz="1600" b="1" i="0">
+                <a:solidFill>
+                  <a:srgbClr val="2E7D32"/>
+                </a:solidFill>
+                <a:latin typeface="Calibri"/>
+              </a:rPr>
+              <a:t>→</a:t>
+            </a:r>
+          </a:p>
+        </p:txBody>
+      </p:sp>
+      <p:sp>
+        <p:nvSpPr>
+          <p:cNvPr id="25" name="Rounded Rectangle 24"/>
           <p:cNvSpPr/>
           <p:nvPr/>
         </p:nvSpPr>
         <p:spPr>
           <a:xfrm>
-            <a:off x="10517428" y="1600200"/>
-            <a:ext cx="1022299" cy="685800"/>
+            <a:off x="9244584" y="3703320"/>
+            <a:ext cx="1901952" cy="658368"/>
           </a:xfrm>
           <a:prstGeom prst="roundRect">
             <a:avLst>
@@ -13994,7 +14446,7 @@
             </a:avLst>
           </a:prstGeom>
           <a:solidFill>
-            <a:srgbClr val="2E5A3C"/>
+            <a:srgbClr val="295333"/>
           </a:solidFill>
           <a:ln>
             <a:noFill/>
@@ -14031,201 +14483,20 @@
               </a:spcAft>
             </a:pPr>
             <a:r>
-              <a:rPr sz="950" b="1" i="0">
+              <a:rPr sz="1200" b="1" i="0">
                 <a:solidFill>
                   <a:srgbClr val="FFFFFF"/>
                 </a:solidFill>
                 <a:latin typeface="Calibri"/>
               </a:rPr>
-              <a:t>Future Scope</a:t>
-            </a:r>
-          </a:p>
-        </p:txBody>
-      </p:sp>
-      <p:sp>
-        <p:nvSpPr>
-          <p:cNvPr id="16" name="TextBox 15"/>
-          <p:cNvSpPr txBox="1"/>
-          <p:nvPr/>
-        </p:nvSpPr>
-        <p:spPr>
-          <a:xfrm>
-            <a:off x="658368" y="2606040"/>
-            <a:ext cx="10881360" cy="1097280"/>
-          </a:xfrm>
-          <a:prstGeom prst="rect">
-            <a:avLst/>
-          </a:prstGeom>
-          <a:noFill/>
-        </p:spPr>
-        <p:txBody>
-          <a:bodyPr wrap="square" lIns="0" rIns="0" tIns="0" bIns="0">
-            <a:spAutoFit/>
-          </a:bodyPr>
-          <a:lstStyle/>
-          <a:p>
-            <a:pPr algn="l">
-              <a:lnSpc>
-                <a:spcPct val="112000"/>
-              </a:lnSpc>
-              <a:spcBef>
-                <a:spcPts val="0"/>
-              </a:spcBef>
-              <a:spcAft>
-                <a:spcPts val="200"/>
-              </a:spcAft>
-            </a:pPr>
-            <a:r>
-              <a:rPr sz="1350" b="0" i="0">
-                <a:solidFill>
-                  <a:srgbClr val="AFC4B6"/>
-                </a:solidFill>
-                <a:latin typeface="Calibri"/>
-              </a:rPr>
-              <a:t>AgriAI 360 has grown from a single explainable recommendation engine into a ten-module farm decision-support platform — nine implemented and verified end-to-end, one (Real-Time Agri Intelligence) partially delivered with Satellite/NDVI honestly left as future scope. Each module is trained, formula-verified, rule-based on real data, or built on real government/scientific data — and each one honest about what it doesn't yet know.</a:t>
-            </a:r>
-          </a:p>
-        </p:txBody>
-      </p:sp>
-      <p:sp>
-        <p:nvSpPr>
-          <p:cNvPr id="17" name="Rounded Rectangle 16"/>
-          <p:cNvSpPr/>
-          <p:nvPr/>
-        </p:nvSpPr>
-        <p:spPr>
-          <a:xfrm>
-            <a:off x="658368" y="3794760"/>
-            <a:ext cx="10881360" cy="1737360"/>
-          </a:xfrm>
-          <a:prstGeom prst="roundRect">
-            <a:avLst>
-              <a:gd name="adj" fmla="val 6000"/>
-            </a:avLst>
-          </a:prstGeom>
-          <a:solidFill>
-            <a:srgbClr val="172F1F"/>
-          </a:solidFill>
-          <a:ln>
-            <a:noFill/>
-          </a:ln>
-          <a:effectLst/>
-        </p:spPr>
-        <p:style>
-          <a:lnRef idx="1">
-            <a:schemeClr val="accent1"/>
-          </a:lnRef>
-          <a:fillRef idx="3">
-            <a:schemeClr val="accent1"/>
-          </a:fillRef>
-          <a:effectRef idx="2">
-            <a:schemeClr val="accent1"/>
-          </a:effectRef>
-          <a:fontRef idx="minor">
-            <a:schemeClr val="lt1"/>
-          </a:fontRef>
-        </p:style>
-        <p:txBody>
-          <a:bodyPr rtlCol="0" anchor="ctr"/>
-          <a:lstStyle/>
-          <a:p>
-            <a:pPr algn="ctr"/>
-          </a:p>
-        </p:txBody>
-      </p:sp>
-      <p:sp>
-        <p:nvSpPr>
-          <p:cNvPr id="18" name="TextBox 17"/>
-          <p:cNvSpPr txBox="1"/>
-          <p:nvPr/>
-        </p:nvSpPr>
-        <p:spPr>
-          <a:xfrm>
-            <a:off x="859536" y="3995928"/>
-            <a:ext cx="10479024" cy="274320"/>
-          </a:xfrm>
-          <a:prstGeom prst="rect">
-            <a:avLst/>
-          </a:prstGeom>
-          <a:noFill/>
-        </p:spPr>
-        <p:txBody>
-          <a:bodyPr wrap="square" lIns="0" rIns="0" tIns="0" bIns="0">
-            <a:spAutoFit/>
-          </a:bodyPr>
-          <a:lstStyle/>
-          <a:p>
-            <a:pPr algn="l">
-              <a:lnSpc>
-                <a:spcPct val="112000"/>
-              </a:lnSpc>
-              <a:spcBef>
-                <a:spcPts val="0"/>
-              </a:spcBef>
-              <a:spcAft>
-                <a:spcPts val="200"/>
-              </a:spcAft>
-            </a:pPr>
-            <a:r>
-              <a:rPr sz="1250" b="1" i="0">
-                <a:solidFill>
-                  <a:srgbClr val="66BB6A"/>
-                </a:solidFill>
-                <a:latin typeface="Calibri"/>
-              </a:rPr>
-              <a:t>REFERENCES</a:t>
-            </a:r>
-          </a:p>
-        </p:txBody>
-      </p:sp>
-      <p:sp>
-        <p:nvSpPr>
-          <p:cNvPr id="19" name="TextBox 18"/>
-          <p:cNvSpPr txBox="1"/>
-          <p:nvPr/>
-        </p:nvSpPr>
-        <p:spPr>
-          <a:xfrm>
-            <a:off x="859536" y="4343400"/>
-            <a:ext cx="10479024" cy="987552"/>
-          </a:xfrm>
-          <a:prstGeom prst="rect">
-            <a:avLst/>
-          </a:prstGeom>
-          <a:noFill/>
-        </p:spPr>
-        <p:txBody>
-          <a:bodyPr wrap="square" lIns="0" rIns="0" tIns="0" bIns="0">
-            <a:spAutoFit/>
-          </a:bodyPr>
-          <a:lstStyle/>
-          <a:p>
-            <a:pPr algn="l">
-              <a:lnSpc>
-                <a:spcPct val="112000"/>
-              </a:lnSpc>
-              <a:spcBef>
-                <a:spcPts val="0"/>
-              </a:spcBef>
-              <a:spcAft>
-                <a:spcPts val="200"/>
-              </a:spcAft>
-            </a:pPr>
-            <a:r>
-              <a:rPr sz="1200" b="0" i="0">
-                <a:solidFill>
-                  <a:srgbClr val="AFC4B6"/>
-                </a:solidFill>
-                <a:latin typeface="Calibri"/>
-              </a:rPr>
-              <a:t>Full reference list: 20 literature-review papers (Phase 1, slides 7-10) + project documentation (docs/dataset.md, docs/ml-methodology.md, docs/architecture.md, docs/future-scope.md) + each module's own train.py / service file + models/*_metrics.json + models/market_price_report.json + this session's code audit (backend test suite: 559/559 passing) and live end-to-end HTTP smoke test.</a:t>
+              <a:t>AI Assistant</a:t>
             </a:r>
           </a:p>
         </p:txBody>
       </p:sp>
       <p:cxnSp>
         <p:nvCxnSpPr>
-          <p:cNvPr id="20" name="Connector 19"/>
+          <p:cNvPr id="26" name="Connector 25"/>
           <p:cNvCxnSpPr/>
           <p:nvPr/>
         </p:nvCxnSpPr>
@@ -14239,7 +14510,7 @@
           </a:prstGeom>
           <a:ln w="9525">
             <a:solidFill>
-              <a:srgbClr val="2A3A32"/>
+              <a:srgbClr val="D8DED8"/>
             </a:solidFill>
           </a:ln>
         </p:spPr>
@@ -14260,7 +14531,7 @@
       </p:cxnSp>
       <p:sp>
         <p:nvSpPr>
-          <p:cNvPr id="21" name="TextBox 20"/>
+          <p:cNvPr id="27" name="TextBox 26"/>
           <p:cNvSpPr txBox="1"/>
           <p:nvPr/>
         </p:nvSpPr>
@@ -14294,7 +14565,7 @@
             <a:r>
               <a:rPr sz="1050" b="0" i="0">
                 <a:solidFill>
-                  <a:srgbClr val="AFC4B6"/>
+                  <a:srgbClr val="8A968E"/>
                 </a:solidFill>
                 <a:latin typeface="Calibri"/>
               </a:rPr>
@@ -14305,7 +14576,7 @@
       </p:sp>
       <p:sp>
         <p:nvSpPr>
-          <p:cNvPr id="22" name="TextBox 21"/>
+          <p:cNvPr id="28" name="TextBox 27"/>
           <p:cNvSpPr txBox="1"/>
           <p:nvPr/>
         </p:nvSpPr>
@@ -14339,11 +14610,1369 @@
             <a:r>
               <a:rPr sz="1050" b="0" i="0">
                 <a:solidFill>
-                  <a:srgbClr val="AFC4B6"/>
+                  <a:srgbClr val="8A968E"/>
                 </a:solidFill>
                 <a:latin typeface="Calibri"/>
               </a:rPr>
               <a:t>18</a:t>
+            </a:r>
+          </a:p>
+        </p:txBody>
+      </p:sp>
+    </p:spTree>
+  </p:cSld>
+  <p:clrMapOvr>
+    <a:masterClrMapping/>
+  </p:clrMapOvr>
+</p:sld>
+</file>
+
+<file path=ppt/slides/slide19.xml><?xml version="1.0" encoding="utf-8"?>
+<p:sld xmlns:a="http://schemas.openxmlformats.org/drawingml/2006/main" xmlns:p="http://schemas.openxmlformats.org/presentationml/2006/main" xmlns:r="http://schemas.openxmlformats.org/officeDocument/2006/relationships">
+  <p:cSld>
+    <p:spTree>
+      <p:nvGrpSpPr>
+        <p:cNvPr id="1" name=""/>
+        <p:cNvGrpSpPr/>
+        <p:nvPr/>
+      </p:nvGrpSpPr>
+      <p:grpSpPr/>
+      <p:sp>
+        <p:nvSpPr>
+          <p:cNvPr id="2" name="Rectangle 1"/>
+          <p:cNvSpPr/>
+          <p:nvPr/>
+        </p:nvSpPr>
+        <p:spPr>
+          <a:xfrm>
+            <a:off x="0" y="0"/>
+            <a:ext cx="12191695" cy="6858000"/>
+          </a:xfrm>
+          <a:prstGeom prst="rect">
+            <a:avLst/>
+          </a:prstGeom>
+          <a:solidFill>
+            <a:srgbClr val="F6F9F6"/>
+          </a:solidFill>
+          <a:ln>
+            <a:noFill/>
+          </a:ln>
+          <a:effectLst/>
+        </p:spPr>
+        <p:style>
+          <a:lnRef idx="1">
+            <a:schemeClr val="accent1"/>
+          </a:lnRef>
+          <a:fillRef idx="3">
+            <a:schemeClr val="accent1"/>
+          </a:fillRef>
+          <a:effectRef idx="2">
+            <a:schemeClr val="accent1"/>
+          </a:effectRef>
+          <a:fontRef idx="minor">
+            <a:schemeClr val="lt1"/>
+          </a:fontRef>
+        </p:style>
+        <p:txBody>
+          <a:bodyPr rtlCol="0" anchor="ctr"/>
+          <a:lstStyle/>
+          <a:p>
+            <a:pPr algn="ctr"/>
+          </a:p>
+        </p:txBody>
+      </p:sp>
+      <p:sp>
+        <p:nvSpPr>
+          <p:cNvPr id="3" name="Oval 2"/>
+          <p:cNvSpPr/>
+          <p:nvPr/>
+        </p:nvSpPr>
+        <p:spPr>
+          <a:xfrm>
+            <a:off x="658368" y="475488"/>
+            <a:ext cx="82296" cy="82296"/>
+          </a:xfrm>
+          <a:prstGeom prst="ellipse">
+            <a:avLst/>
+          </a:prstGeom>
+          <a:solidFill>
+            <a:srgbClr val="2E7D32"/>
+          </a:solidFill>
+          <a:ln>
+            <a:noFill/>
+          </a:ln>
+          <a:effectLst/>
+        </p:spPr>
+        <p:style>
+          <a:lnRef idx="1">
+            <a:schemeClr val="accent1"/>
+          </a:lnRef>
+          <a:fillRef idx="3">
+            <a:schemeClr val="accent1"/>
+          </a:fillRef>
+          <a:effectRef idx="2">
+            <a:schemeClr val="accent1"/>
+          </a:effectRef>
+          <a:fontRef idx="minor">
+            <a:schemeClr val="lt1"/>
+          </a:fontRef>
+        </p:style>
+        <p:txBody>
+          <a:bodyPr rtlCol="0" anchor="ctr"/>
+          <a:lstStyle/>
+          <a:p>
+            <a:pPr algn="ctr"/>
+          </a:p>
+        </p:txBody>
+      </p:sp>
+      <p:sp>
+        <p:nvSpPr>
+          <p:cNvPr id="4" name="TextBox 3"/>
+          <p:cNvSpPr txBox="1"/>
+          <p:nvPr/>
+        </p:nvSpPr>
+        <p:spPr>
+          <a:xfrm>
+            <a:off x="841248" y="420624"/>
+            <a:ext cx="9144000" cy="274320"/>
+          </a:xfrm>
+          <a:prstGeom prst="rect">
+            <a:avLst/>
+          </a:prstGeom>
+          <a:noFill/>
+        </p:spPr>
+        <p:txBody>
+          <a:bodyPr wrap="square" lIns="0" rIns="0" tIns="0" bIns="0">
+            <a:spAutoFit/>
+          </a:bodyPr>
+          <a:lstStyle/>
+          <a:p>
+            <a:pPr algn="l">
+              <a:lnSpc>
+                <a:spcPct val="112000"/>
+              </a:lnSpc>
+              <a:spcBef>
+                <a:spcPts val="0"/>
+              </a:spcBef>
+              <a:spcAft>
+                <a:spcPts val="200"/>
+              </a:spcAft>
+            </a:pPr>
+            <a:r>
+              <a:rPr sz="1250" b="1" i="0">
+                <a:solidFill>
+                  <a:srgbClr val="2E7D32"/>
+                </a:solidFill>
+                <a:latin typeface="Calibri"/>
+              </a:rPr>
+              <a:t>PROJECT STATUS</a:t>
+            </a:r>
+          </a:p>
+        </p:txBody>
+      </p:sp>
+      <p:sp>
+        <p:nvSpPr>
+          <p:cNvPr id="5" name="TextBox 4"/>
+          <p:cNvSpPr txBox="1"/>
+          <p:nvPr/>
+        </p:nvSpPr>
+        <p:spPr>
+          <a:xfrm>
+            <a:off x="658368" y="713232"/>
+            <a:ext cx="10881360" cy="640080"/>
+          </a:xfrm>
+          <a:prstGeom prst="rect">
+            <a:avLst/>
+          </a:prstGeom>
+          <a:noFill/>
+        </p:spPr>
+        <p:txBody>
+          <a:bodyPr wrap="square" lIns="0" rIns="0" tIns="0" bIns="0">
+            <a:spAutoFit/>
+          </a:bodyPr>
+          <a:lstStyle/>
+          <a:p>
+            <a:pPr algn="l">
+              <a:lnSpc>
+                <a:spcPct val="112000"/>
+              </a:lnSpc>
+              <a:spcBef>
+                <a:spcPts val="0"/>
+              </a:spcBef>
+              <a:spcAft>
+                <a:spcPts val="200"/>
+              </a:spcAft>
+            </a:pPr>
+            <a:r>
+              <a:rPr sz="3200" b="1" i="0">
+                <a:solidFill>
+                  <a:srgbClr val="121B15"/>
+                </a:solidFill>
+                <a:latin typeface="Calibri"/>
+              </a:rPr>
+              <a:t>AgriAI 360 – Current Progress</a:t>
+            </a:r>
+          </a:p>
+        </p:txBody>
+      </p:sp>
+      <p:sp>
+        <p:nvSpPr>
+          <p:cNvPr id="6" name="Oval 5"/>
+          <p:cNvSpPr/>
+          <p:nvPr/>
+        </p:nvSpPr>
+        <p:spPr>
+          <a:xfrm>
+            <a:off x="658368" y="1764792"/>
+            <a:ext cx="256032" cy="256032"/>
+          </a:xfrm>
+          <a:prstGeom prst="ellipse">
+            <a:avLst/>
+          </a:prstGeom>
+          <a:solidFill>
+            <a:srgbClr val="295333"/>
+          </a:solidFill>
+          <a:ln>
+            <a:noFill/>
+          </a:ln>
+          <a:effectLst/>
+        </p:spPr>
+        <p:style>
+          <a:lnRef idx="1">
+            <a:schemeClr val="accent1"/>
+          </a:lnRef>
+          <a:fillRef idx="3">
+            <a:schemeClr val="accent1"/>
+          </a:fillRef>
+          <a:effectRef idx="2">
+            <a:schemeClr val="accent1"/>
+          </a:effectRef>
+          <a:fontRef idx="minor">
+            <a:schemeClr val="lt1"/>
+          </a:fontRef>
+        </p:style>
+        <p:txBody>
+          <a:bodyPr rtlCol="0" anchor="ctr"/>
+          <a:lstStyle/>
+          <a:p>
+            <a:pPr algn="ctr">
+              <a:lnSpc>
+                <a:spcPct val="112000"/>
+              </a:lnSpc>
+              <a:spcBef>
+                <a:spcPts val="0"/>
+              </a:spcBef>
+              <a:spcAft>
+                <a:spcPts val="200"/>
+              </a:spcAft>
+            </a:pPr>
+            <a:r>
+              <a:rPr sz="1200" b="1" i="0">
+                <a:solidFill>
+                  <a:srgbClr val="FFFFFF"/>
+                </a:solidFill>
+                <a:latin typeface="Calibri"/>
+              </a:rPr>
+              <a:t>✓</a:t>
+            </a:r>
+          </a:p>
+        </p:txBody>
+      </p:sp>
+      <p:sp>
+        <p:nvSpPr>
+          <p:cNvPr id="7" name="TextBox 6"/>
+          <p:cNvSpPr txBox="1"/>
+          <p:nvPr/>
+        </p:nvSpPr>
+        <p:spPr>
+          <a:xfrm>
+            <a:off x="1042416" y="1737360"/>
+            <a:ext cx="4873752" cy="457200"/>
+          </a:xfrm>
+          <a:prstGeom prst="rect">
+            <a:avLst/>
+          </a:prstGeom>
+          <a:noFill/>
+        </p:spPr>
+        <p:txBody>
+          <a:bodyPr wrap="square" lIns="0" rIns="0" tIns="0" bIns="0" anchor="ctr">
+            <a:spAutoFit/>
+          </a:bodyPr>
+          <a:lstStyle/>
+          <a:p>
+            <a:pPr algn="l">
+              <a:lnSpc>
+                <a:spcPct val="112000"/>
+              </a:lnSpc>
+              <a:spcBef>
+                <a:spcPts val="0"/>
+              </a:spcBef>
+              <a:spcAft>
+                <a:spcPts val="200"/>
+              </a:spcAft>
+            </a:pPr>
+            <a:r>
+              <a:rPr sz="1400" b="0" i="0">
+                <a:solidFill>
+                  <a:srgbClr val="121B15"/>
+                </a:solidFill>
+                <a:latin typeface="Calibri"/>
+              </a:rPr>
+              <a:t>Backend and frontend integrated</a:t>
+            </a:r>
+          </a:p>
+        </p:txBody>
+      </p:sp>
+      <p:sp>
+        <p:nvSpPr>
+          <p:cNvPr id="8" name="Oval 7"/>
+          <p:cNvSpPr/>
+          <p:nvPr/>
+        </p:nvSpPr>
+        <p:spPr>
+          <a:xfrm>
+            <a:off x="658368" y="2331720"/>
+            <a:ext cx="256032" cy="256032"/>
+          </a:xfrm>
+          <a:prstGeom prst="ellipse">
+            <a:avLst/>
+          </a:prstGeom>
+          <a:solidFill>
+            <a:srgbClr val="295333"/>
+          </a:solidFill>
+          <a:ln>
+            <a:noFill/>
+          </a:ln>
+          <a:effectLst/>
+        </p:spPr>
+        <p:style>
+          <a:lnRef idx="1">
+            <a:schemeClr val="accent1"/>
+          </a:lnRef>
+          <a:fillRef idx="3">
+            <a:schemeClr val="accent1"/>
+          </a:fillRef>
+          <a:effectRef idx="2">
+            <a:schemeClr val="accent1"/>
+          </a:effectRef>
+          <a:fontRef idx="minor">
+            <a:schemeClr val="lt1"/>
+          </a:fontRef>
+        </p:style>
+        <p:txBody>
+          <a:bodyPr rtlCol="0" anchor="ctr"/>
+          <a:lstStyle/>
+          <a:p>
+            <a:pPr algn="ctr">
+              <a:lnSpc>
+                <a:spcPct val="112000"/>
+              </a:lnSpc>
+              <a:spcBef>
+                <a:spcPts val="0"/>
+              </a:spcBef>
+              <a:spcAft>
+                <a:spcPts val="200"/>
+              </a:spcAft>
+            </a:pPr>
+            <a:r>
+              <a:rPr sz="1200" b="1" i="0">
+                <a:solidFill>
+                  <a:srgbClr val="FFFFFF"/>
+                </a:solidFill>
+                <a:latin typeface="Calibri"/>
+              </a:rPr>
+              <a:t>✓</a:t>
+            </a:r>
+          </a:p>
+        </p:txBody>
+      </p:sp>
+      <p:sp>
+        <p:nvSpPr>
+          <p:cNvPr id="9" name="TextBox 8"/>
+          <p:cNvSpPr txBox="1"/>
+          <p:nvPr/>
+        </p:nvSpPr>
+        <p:spPr>
+          <a:xfrm>
+            <a:off x="1042416" y="2304288"/>
+            <a:ext cx="4873752" cy="457200"/>
+          </a:xfrm>
+          <a:prstGeom prst="rect">
+            <a:avLst/>
+          </a:prstGeom>
+          <a:noFill/>
+        </p:spPr>
+        <p:txBody>
+          <a:bodyPr wrap="square" lIns="0" rIns="0" tIns="0" bIns="0" anchor="ctr">
+            <a:spAutoFit/>
+          </a:bodyPr>
+          <a:lstStyle/>
+          <a:p>
+            <a:pPr algn="l">
+              <a:lnSpc>
+                <a:spcPct val="112000"/>
+              </a:lnSpc>
+              <a:spcBef>
+                <a:spcPts val="0"/>
+              </a:spcBef>
+              <a:spcAft>
+                <a:spcPts val="200"/>
+              </a:spcAft>
+            </a:pPr>
+            <a:r>
+              <a:rPr sz="1400" b="0" i="0">
+                <a:solidFill>
+                  <a:srgbClr val="121B15"/>
+                </a:solidFill>
+                <a:latin typeface="Calibri"/>
+              </a:rPr>
+              <a:t>Crop recommendation implemented</a:t>
+            </a:r>
+          </a:p>
+        </p:txBody>
+      </p:sp>
+      <p:sp>
+        <p:nvSpPr>
+          <p:cNvPr id="10" name="Oval 9"/>
+          <p:cNvSpPr/>
+          <p:nvPr/>
+        </p:nvSpPr>
+        <p:spPr>
+          <a:xfrm>
+            <a:off x="658368" y="2898648"/>
+            <a:ext cx="256032" cy="256032"/>
+          </a:xfrm>
+          <a:prstGeom prst="ellipse">
+            <a:avLst/>
+          </a:prstGeom>
+          <a:solidFill>
+            <a:srgbClr val="295333"/>
+          </a:solidFill>
+          <a:ln>
+            <a:noFill/>
+          </a:ln>
+          <a:effectLst/>
+        </p:spPr>
+        <p:style>
+          <a:lnRef idx="1">
+            <a:schemeClr val="accent1"/>
+          </a:lnRef>
+          <a:fillRef idx="3">
+            <a:schemeClr val="accent1"/>
+          </a:fillRef>
+          <a:effectRef idx="2">
+            <a:schemeClr val="accent1"/>
+          </a:effectRef>
+          <a:fontRef idx="minor">
+            <a:schemeClr val="lt1"/>
+          </a:fontRef>
+        </p:style>
+        <p:txBody>
+          <a:bodyPr rtlCol="0" anchor="ctr"/>
+          <a:lstStyle/>
+          <a:p>
+            <a:pPr algn="ctr">
+              <a:lnSpc>
+                <a:spcPct val="112000"/>
+              </a:lnSpc>
+              <a:spcBef>
+                <a:spcPts val="0"/>
+              </a:spcBef>
+              <a:spcAft>
+                <a:spcPts val="200"/>
+              </a:spcAft>
+            </a:pPr>
+            <a:r>
+              <a:rPr sz="1200" b="1" i="0">
+                <a:solidFill>
+                  <a:srgbClr val="FFFFFF"/>
+                </a:solidFill>
+                <a:latin typeface="Calibri"/>
+              </a:rPr>
+              <a:t>✓</a:t>
+            </a:r>
+          </a:p>
+        </p:txBody>
+      </p:sp>
+      <p:sp>
+        <p:nvSpPr>
+          <p:cNvPr id="11" name="TextBox 10"/>
+          <p:cNvSpPr txBox="1"/>
+          <p:nvPr/>
+        </p:nvSpPr>
+        <p:spPr>
+          <a:xfrm>
+            <a:off x="1042416" y="2871216"/>
+            <a:ext cx="4873752" cy="457200"/>
+          </a:xfrm>
+          <a:prstGeom prst="rect">
+            <a:avLst/>
+          </a:prstGeom>
+          <a:noFill/>
+        </p:spPr>
+        <p:txBody>
+          <a:bodyPr wrap="square" lIns="0" rIns="0" tIns="0" bIns="0" anchor="ctr">
+            <a:spAutoFit/>
+          </a:bodyPr>
+          <a:lstStyle/>
+          <a:p>
+            <a:pPr algn="l">
+              <a:lnSpc>
+                <a:spcPct val="112000"/>
+              </a:lnSpc>
+              <a:spcBef>
+                <a:spcPts val="0"/>
+              </a:spcBef>
+              <a:spcAft>
+                <a:spcPts val="200"/>
+              </a:spcAft>
+            </a:pPr>
+            <a:r>
+              <a:rPr sz="1400" b="0" i="0">
+                <a:solidFill>
+                  <a:srgbClr val="121B15"/>
+                </a:solidFill>
+                <a:latin typeface="Calibri"/>
+              </a:rPr>
+              <a:t>Disease detection model integrated</a:t>
+            </a:r>
+          </a:p>
+        </p:txBody>
+      </p:sp>
+      <p:sp>
+        <p:nvSpPr>
+          <p:cNvPr id="12" name="Oval 11"/>
+          <p:cNvSpPr/>
+          <p:nvPr/>
+        </p:nvSpPr>
+        <p:spPr>
+          <a:xfrm>
+            <a:off x="658368" y="3465576"/>
+            <a:ext cx="256032" cy="256032"/>
+          </a:xfrm>
+          <a:prstGeom prst="ellipse">
+            <a:avLst/>
+          </a:prstGeom>
+          <a:solidFill>
+            <a:srgbClr val="295333"/>
+          </a:solidFill>
+          <a:ln>
+            <a:noFill/>
+          </a:ln>
+          <a:effectLst/>
+        </p:spPr>
+        <p:style>
+          <a:lnRef idx="1">
+            <a:schemeClr val="accent1"/>
+          </a:lnRef>
+          <a:fillRef idx="3">
+            <a:schemeClr val="accent1"/>
+          </a:fillRef>
+          <a:effectRef idx="2">
+            <a:schemeClr val="accent1"/>
+          </a:effectRef>
+          <a:fontRef idx="minor">
+            <a:schemeClr val="lt1"/>
+          </a:fontRef>
+        </p:style>
+        <p:txBody>
+          <a:bodyPr rtlCol="0" anchor="ctr"/>
+          <a:lstStyle/>
+          <a:p>
+            <a:pPr algn="ctr">
+              <a:lnSpc>
+                <a:spcPct val="112000"/>
+              </a:lnSpc>
+              <a:spcBef>
+                <a:spcPts val="0"/>
+              </a:spcBef>
+              <a:spcAft>
+                <a:spcPts val="200"/>
+              </a:spcAft>
+            </a:pPr>
+            <a:r>
+              <a:rPr sz="1200" b="1" i="0">
+                <a:solidFill>
+                  <a:srgbClr val="FFFFFF"/>
+                </a:solidFill>
+                <a:latin typeface="Calibri"/>
+              </a:rPr>
+              <a:t>✓</a:t>
+            </a:r>
+          </a:p>
+        </p:txBody>
+      </p:sp>
+      <p:sp>
+        <p:nvSpPr>
+          <p:cNvPr id="13" name="TextBox 12"/>
+          <p:cNvSpPr txBox="1"/>
+          <p:nvPr/>
+        </p:nvSpPr>
+        <p:spPr>
+          <a:xfrm>
+            <a:off x="1042416" y="3438144"/>
+            <a:ext cx="4873752" cy="457200"/>
+          </a:xfrm>
+          <a:prstGeom prst="rect">
+            <a:avLst/>
+          </a:prstGeom>
+          <a:noFill/>
+        </p:spPr>
+        <p:txBody>
+          <a:bodyPr wrap="square" lIns="0" rIns="0" tIns="0" bIns="0" anchor="ctr">
+            <a:spAutoFit/>
+          </a:bodyPr>
+          <a:lstStyle/>
+          <a:p>
+            <a:pPr algn="l">
+              <a:lnSpc>
+                <a:spcPct val="112000"/>
+              </a:lnSpc>
+              <a:spcBef>
+                <a:spcPts val="0"/>
+              </a:spcBef>
+              <a:spcAft>
+                <a:spcPts val="200"/>
+              </a:spcAft>
+            </a:pPr>
+            <a:r>
+              <a:rPr sz="1400" b="0" i="0">
+                <a:solidFill>
+                  <a:srgbClr val="121B15"/>
+                </a:solidFill>
+                <a:latin typeface="Calibri"/>
+              </a:rPr>
+              <a:t>Soil intelligence implemented</a:t>
+            </a:r>
+          </a:p>
+        </p:txBody>
+      </p:sp>
+      <p:sp>
+        <p:nvSpPr>
+          <p:cNvPr id="14" name="Oval 13"/>
+          <p:cNvSpPr/>
+          <p:nvPr/>
+        </p:nvSpPr>
+        <p:spPr>
+          <a:xfrm>
+            <a:off x="658368" y="4032504"/>
+            <a:ext cx="256032" cy="256032"/>
+          </a:xfrm>
+          <a:prstGeom prst="ellipse">
+            <a:avLst/>
+          </a:prstGeom>
+          <a:solidFill>
+            <a:srgbClr val="295333"/>
+          </a:solidFill>
+          <a:ln>
+            <a:noFill/>
+          </a:ln>
+          <a:effectLst/>
+        </p:spPr>
+        <p:style>
+          <a:lnRef idx="1">
+            <a:schemeClr val="accent1"/>
+          </a:lnRef>
+          <a:fillRef idx="3">
+            <a:schemeClr val="accent1"/>
+          </a:fillRef>
+          <a:effectRef idx="2">
+            <a:schemeClr val="accent1"/>
+          </a:effectRef>
+          <a:fontRef idx="minor">
+            <a:schemeClr val="lt1"/>
+          </a:fontRef>
+        </p:style>
+        <p:txBody>
+          <a:bodyPr rtlCol="0" anchor="ctr"/>
+          <a:lstStyle/>
+          <a:p>
+            <a:pPr algn="ctr">
+              <a:lnSpc>
+                <a:spcPct val="112000"/>
+              </a:lnSpc>
+              <a:spcBef>
+                <a:spcPts val="0"/>
+              </a:spcBef>
+              <a:spcAft>
+                <a:spcPts val="200"/>
+              </a:spcAft>
+            </a:pPr>
+            <a:r>
+              <a:rPr sz="1200" b="1" i="0">
+                <a:solidFill>
+                  <a:srgbClr val="FFFFFF"/>
+                </a:solidFill>
+                <a:latin typeface="Calibri"/>
+              </a:rPr>
+              <a:t>✓</a:t>
+            </a:r>
+          </a:p>
+        </p:txBody>
+      </p:sp>
+      <p:sp>
+        <p:nvSpPr>
+          <p:cNvPr id="15" name="TextBox 14"/>
+          <p:cNvSpPr txBox="1"/>
+          <p:nvPr/>
+        </p:nvSpPr>
+        <p:spPr>
+          <a:xfrm>
+            <a:off x="1042416" y="4005072"/>
+            <a:ext cx="4873752" cy="457200"/>
+          </a:xfrm>
+          <a:prstGeom prst="rect">
+            <a:avLst/>
+          </a:prstGeom>
+          <a:noFill/>
+        </p:spPr>
+        <p:txBody>
+          <a:bodyPr wrap="square" lIns="0" rIns="0" tIns="0" bIns="0" anchor="ctr">
+            <a:spAutoFit/>
+          </a:bodyPr>
+          <a:lstStyle/>
+          <a:p>
+            <a:pPr algn="l">
+              <a:lnSpc>
+                <a:spcPct val="112000"/>
+              </a:lnSpc>
+              <a:spcBef>
+                <a:spcPts val="0"/>
+              </a:spcBef>
+              <a:spcAft>
+                <a:spcPts val="200"/>
+              </a:spcAft>
+            </a:pPr>
+            <a:r>
+              <a:rPr sz="1400" b="0" i="0">
+                <a:solidFill>
+                  <a:srgbClr val="121B15"/>
+                </a:solidFill>
+                <a:latin typeface="Calibri"/>
+              </a:rPr>
+              <a:t>Weather, water and profit modules integrated</a:t>
+            </a:r>
+          </a:p>
+        </p:txBody>
+      </p:sp>
+      <p:sp>
+        <p:nvSpPr>
+          <p:cNvPr id="16" name="Oval 15"/>
+          <p:cNvSpPr/>
+          <p:nvPr/>
+        </p:nvSpPr>
+        <p:spPr>
+          <a:xfrm>
+            <a:off x="6281928" y="1764792"/>
+            <a:ext cx="256032" cy="256032"/>
+          </a:xfrm>
+          <a:prstGeom prst="ellipse">
+            <a:avLst/>
+          </a:prstGeom>
+          <a:solidFill>
+            <a:srgbClr val="295333"/>
+          </a:solidFill>
+          <a:ln>
+            <a:noFill/>
+          </a:ln>
+          <a:effectLst/>
+        </p:spPr>
+        <p:style>
+          <a:lnRef idx="1">
+            <a:schemeClr val="accent1"/>
+          </a:lnRef>
+          <a:fillRef idx="3">
+            <a:schemeClr val="accent1"/>
+          </a:fillRef>
+          <a:effectRef idx="2">
+            <a:schemeClr val="accent1"/>
+          </a:effectRef>
+          <a:fontRef idx="minor">
+            <a:schemeClr val="lt1"/>
+          </a:fontRef>
+        </p:style>
+        <p:txBody>
+          <a:bodyPr rtlCol="0" anchor="ctr"/>
+          <a:lstStyle/>
+          <a:p>
+            <a:pPr algn="ctr">
+              <a:lnSpc>
+                <a:spcPct val="112000"/>
+              </a:lnSpc>
+              <a:spcBef>
+                <a:spcPts val="0"/>
+              </a:spcBef>
+              <a:spcAft>
+                <a:spcPts val="200"/>
+              </a:spcAft>
+            </a:pPr>
+            <a:r>
+              <a:rPr sz="1200" b="1" i="0">
+                <a:solidFill>
+                  <a:srgbClr val="FFFFFF"/>
+                </a:solidFill>
+                <a:latin typeface="Calibri"/>
+              </a:rPr>
+              <a:t>✓</a:t>
+            </a:r>
+          </a:p>
+        </p:txBody>
+      </p:sp>
+      <p:sp>
+        <p:nvSpPr>
+          <p:cNvPr id="17" name="TextBox 16"/>
+          <p:cNvSpPr txBox="1"/>
+          <p:nvPr/>
+        </p:nvSpPr>
+        <p:spPr>
+          <a:xfrm>
+            <a:off x="6665976" y="1737360"/>
+            <a:ext cx="4873752" cy="457200"/>
+          </a:xfrm>
+          <a:prstGeom prst="rect">
+            <a:avLst/>
+          </a:prstGeom>
+          <a:noFill/>
+        </p:spPr>
+        <p:txBody>
+          <a:bodyPr wrap="square" lIns="0" rIns="0" tIns="0" bIns="0" anchor="ctr">
+            <a:spAutoFit/>
+          </a:bodyPr>
+          <a:lstStyle/>
+          <a:p>
+            <a:pPr algn="l">
+              <a:lnSpc>
+                <a:spcPct val="112000"/>
+              </a:lnSpc>
+              <a:spcBef>
+                <a:spcPts val="0"/>
+              </a:spcBef>
+              <a:spcAft>
+                <a:spcPts val="200"/>
+              </a:spcAft>
+            </a:pPr>
+            <a:r>
+              <a:rPr sz="1400" b="0" i="0">
+                <a:solidFill>
+                  <a:srgbClr val="121B15"/>
+                </a:solidFill>
+                <a:latin typeface="Calibri"/>
+              </a:rPr>
+              <a:t>Market price and notifications available</a:t>
+            </a:r>
+          </a:p>
+        </p:txBody>
+      </p:sp>
+      <p:sp>
+        <p:nvSpPr>
+          <p:cNvPr id="18" name="Oval 17"/>
+          <p:cNvSpPr/>
+          <p:nvPr/>
+        </p:nvSpPr>
+        <p:spPr>
+          <a:xfrm>
+            <a:off x="6281928" y="2331720"/>
+            <a:ext cx="256032" cy="256032"/>
+          </a:xfrm>
+          <a:prstGeom prst="ellipse">
+            <a:avLst/>
+          </a:prstGeom>
+          <a:solidFill>
+            <a:srgbClr val="295333"/>
+          </a:solidFill>
+          <a:ln>
+            <a:noFill/>
+          </a:ln>
+          <a:effectLst/>
+        </p:spPr>
+        <p:style>
+          <a:lnRef idx="1">
+            <a:schemeClr val="accent1"/>
+          </a:lnRef>
+          <a:fillRef idx="3">
+            <a:schemeClr val="accent1"/>
+          </a:fillRef>
+          <a:effectRef idx="2">
+            <a:schemeClr val="accent1"/>
+          </a:effectRef>
+          <a:fontRef idx="minor">
+            <a:schemeClr val="lt1"/>
+          </a:fontRef>
+        </p:style>
+        <p:txBody>
+          <a:bodyPr rtlCol="0" anchor="ctr"/>
+          <a:lstStyle/>
+          <a:p>
+            <a:pPr algn="ctr">
+              <a:lnSpc>
+                <a:spcPct val="112000"/>
+              </a:lnSpc>
+              <a:spcBef>
+                <a:spcPts val="0"/>
+              </a:spcBef>
+              <a:spcAft>
+                <a:spcPts val="200"/>
+              </a:spcAft>
+            </a:pPr>
+            <a:r>
+              <a:rPr sz="1200" b="1" i="0">
+                <a:solidFill>
+                  <a:srgbClr val="FFFFFF"/>
+                </a:solidFill>
+                <a:latin typeface="Calibri"/>
+              </a:rPr>
+              <a:t>✓</a:t>
+            </a:r>
+          </a:p>
+        </p:txBody>
+      </p:sp>
+      <p:sp>
+        <p:nvSpPr>
+          <p:cNvPr id="19" name="TextBox 18"/>
+          <p:cNvSpPr txBox="1"/>
+          <p:nvPr/>
+        </p:nvSpPr>
+        <p:spPr>
+          <a:xfrm>
+            <a:off x="6665976" y="2304288"/>
+            <a:ext cx="4873752" cy="457200"/>
+          </a:xfrm>
+          <a:prstGeom prst="rect">
+            <a:avLst/>
+          </a:prstGeom>
+          <a:noFill/>
+        </p:spPr>
+        <p:txBody>
+          <a:bodyPr wrap="square" lIns="0" rIns="0" tIns="0" bIns="0" anchor="ctr">
+            <a:spAutoFit/>
+          </a:bodyPr>
+          <a:lstStyle/>
+          <a:p>
+            <a:pPr algn="l">
+              <a:lnSpc>
+                <a:spcPct val="112000"/>
+              </a:lnSpc>
+              <a:spcBef>
+                <a:spcPts val="0"/>
+              </a:spcBef>
+              <a:spcAft>
+                <a:spcPts val="200"/>
+              </a:spcAft>
+            </a:pPr>
+            <a:r>
+              <a:rPr sz="1400" b="0" i="0">
+                <a:solidFill>
+                  <a:srgbClr val="121B15"/>
+                </a:solidFill>
+                <a:latin typeface="Calibri"/>
+              </a:rPr>
+              <a:t>AI Assistant integrated</a:t>
+            </a:r>
+          </a:p>
+        </p:txBody>
+      </p:sp>
+      <p:sp>
+        <p:nvSpPr>
+          <p:cNvPr id="20" name="Oval 19"/>
+          <p:cNvSpPr/>
+          <p:nvPr/>
+        </p:nvSpPr>
+        <p:spPr>
+          <a:xfrm>
+            <a:off x="6281928" y="2898648"/>
+            <a:ext cx="256032" cy="256032"/>
+          </a:xfrm>
+          <a:prstGeom prst="ellipse">
+            <a:avLst/>
+          </a:prstGeom>
+          <a:solidFill>
+            <a:srgbClr val="295333"/>
+          </a:solidFill>
+          <a:ln>
+            <a:noFill/>
+          </a:ln>
+          <a:effectLst/>
+        </p:spPr>
+        <p:style>
+          <a:lnRef idx="1">
+            <a:schemeClr val="accent1"/>
+          </a:lnRef>
+          <a:fillRef idx="3">
+            <a:schemeClr val="accent1"/>
+          </a:fillRef>
+          <a:effectRef idx="2">
+            <a:schemeClr val="accent1"/>
+          </a:effectRef>
+          <a:fontRef idx="minor">
+            <a:schemeClr val="lt1"/>
+          </a:fontRef>
+        </p:style>
+        <p:txBody>
+          <a:bodyPr rtlCol="0" anchor="ctr"/>
+          <a:lstStyle/>
+          <a:p>
+            <a:pPr algn="ctr">
+              <a:lnSpc>
+                <a:spcPct val="112000"/>
+              </a:lnSpc>
+              <a:spcBef>
+                <a:spcPts val="0"/>
+              </a:spcBef>
+              <a:spcAft>
+                <a:spcPts val="200"/>
+              </a:spcAft>
+            </a:pPr>
+            <a:r>
+              <a:rPr sz="1200" b="1" i="0">
+                <a:solidFill>
+                  <a:srgbClr val="FFFFFF"/>
+                </a:solidFill>
+                <a:latin typeface="Calibri"/>
+              </a:rPr>
+              <a:t>✓</a:t>
+            </a:r>
+          </a:p>
+        </p:txBody>
+      </p:sp>
+      <p:sp>
+        <p:nvSpPr>
+          <p:cNvPr id="21" name="TextBox 20"/>
+          <p:cNvSpPr txBox="1"/>
+          <p:nvPr/>
+        </p:nvSpPr>
+        <p:spPr>
+          <a:xfrm>
+            <a:off x="6665976" y="2871216"/>
+            <a:ext cx="4873752" cy="457200"/>
+          </a:xfrm>
+          <a:prstGeom prst="rect">
+            <a:avLst/>
+          </a:prstGeom>
+          <a:noFill/>
+        </p:spPr>
+        <p:txBody>
+          <a:bodyPr wrap="square" lIns="0" rIns="0" tIns="0" bIns="0" anchor="ctr">
+            <a:spAutoFit/>
+          </a:bodyPr>
+          <a:lstStyle/>
+          <a:p>
+            <a:pPr algn="l">
+              <a:lnSpc>
+                <a:spcPct val="112000"/>
+              </a:lnSpc>
+              <a:spcBef>
+                <a:spcPts val="0"/>
+              </a:spcBef>
+              <a:spcAft>
+                <a:spcPts val="200"/>
+              </a:spcAft>
+            </a:pPr>
+            <a:r>
+              <a:rPr sz="1400" b="0" i="0">
+                <a:solidFill>
+                  <a:srgbClr val="121B15"/>
+                </a:solidFill>
+                <a:latin typeface="Calibri"/>
+              </a:rPr>
+              <a:t>End-to-end API testing completed</a:t>
+            </a:r>
+          </a:p>
+        </p:txBody>
+      </p:sp>
+      <p:sp>
+        <p:nvSpPr>
+          <p:cNvPr id="22" name="Oval 21"/>
+          <p:cNvSpPr/>
+          <p:nvPr/>
+        </p:nvSpPr>
+        <p:spPr>
+          <a:xfrm>
+            <a:off x="6281928" y="3465576"/>
+            <a:ext cx="256032" cy="256032"/>
+          </a:xfrm>
+          <a:prstGeom prst="ellipse">
+            <a:avLst/>
+          </a:prstGeom>
+          <a:solidFill>
+            <a:srgbClr val="295333"/>
+          </a:solidFill>
+          <a:ln>
+            <a:noFill/>
+          </a:ln>
+          <a:effectLst/>
+        </p:spPr>
+        <p:style>
+          <a:lnRef idx="1">
+            <a:schemeClr val="accent1"/>
+          </a:lnRef>
+          <a:fillRef idx="3">
+            <a:schemeClr val="accent1"/>
+          </a:fillRef>
+          <a:effectRef idx="2">
+            <a:schemeClr val="accent1"/>
+          </a:effectRef>
+          <a:fontRef idx="minor">
+            <a:schemeClr val="lt1"/>
+          </a:fontRef>
+        </p:style>
+        <p:txBody>
+          <a:bodyPr rtlCol="0" anchor="ctr"/>
+          <a:lstStyle/>
+          <a:p>
+            <a:pPr algn="ctr">
+              <a:lnSpc>
+                <a:spcPct val="112000"/>
+              </a:lnSpc>
+              <a:spcBef>
+                <a:spcPts val="0"/>
+              </a:spcBef>
+              <a:spcAft>
+                <a:spcPts val="200"/>
+              </a:spcAft>
+            </a:pPr>
+            <a:r>
+              <a:rPr sz="1200" b="1" i="0">
+                <a:solidFill>
+                  <a:srgbClr val="FFFFFF"/>
+                </a:solidFill>
+                <a:latin typeface="Calibri"/>
+              </a:rPr>
+              <a:t>✓</a:t>
+            </a:r>
+          </a:p>
+        </p:txBody>
+      </p:sp>
+      <p:sp>
+        <p:nvSpPr>
+          <p:cNvPr id="23" name="TextBox 22"/>
+          <p:cNvSpPr txBox="1"/>
+          <p:nvPr/>
+        </p:nvSpPr>
+        <p:spPr>
+          <a:xfrm>
+            <a:off x="6665976" y="3438144"/>
+            <a:ext cx="4873752" cy="457200"/>
+          </a:xfrm>
+          <a:prstGeom prst="rect">
+            <a:avLst/>
+          </a:prstGeom>
+          <a:noFill/>
+        </p:spPr>
+        <p:txBody>
+          <a:bodyPr wrap="square" lIns="0" rIns="0" tIns="0" bIns="0" anchor="ctr">
+            <a:spAutoFit/>
+          </a:bodyPr>
+          <a:lstStyle/>
+          <a:p>
+            <a:pPr algn="l">
+              <a:lnSpc>
+                <a:spcPct val="112000"/>
+              </a:lnSpc>
+              <a:spcBef>
+                <a:spcPts val="0"/>
+              </a:spcBef>
+              <a:spcAft>
+                <a:spcPts val="200"/>
+              </a:spcAft>
+            </a:pPr>
+            <a:r>
+              <a:rPr sz="1400" b="0" i="0">
+                <a:solidFill>
+                  <a:srgbClr val="121B15"/>
+                </a:solidFill>
+                <a:latin typeface="Calibri"/>
+              </a:rPr>
+              <a:t>Documentation updated</a:t>
+            </a:r>
+          </a:p>
+        </p:txBody>
+      </p:sp>
+      <p:sp>
+        <p:nvSpPr>
+          <p:cNvPr id="24" name="Rounded Rectangle 23"/>
+          <p:cNvSpPr/>
+          <p:nvPr/>
+        </p:nvSpPr>
+        <p:spPr>
+          <a:xfrm>
+            <a:off x="4178808" y="5074920"/>
+            <a:ext cx="3840480" cy="548640"/>
+          </a:xfrm>
+          <a:prstGeom prst="roundRect">
+            <a:avLst>
+              <a:gd name="adj" fmla="val 50000"/>
+            </a:avLst>
+          </a:prstGeom>
+          <a:solidFill>
+            <a:srgbClr val="DFA840"/>
+          </a:solidFill>
+          <a:ln>
+            <a:noFill/>
+          </a:ln>
+          <a:effectLst/>
+        </p:spPr>
+        <p:style>
+          <a:lnRef idx="1">
+            <a:schemeClr val="accent1"/>
+          </a:lnRef>
+          <a:fillRef idx="3">
+            <a:schemeClr val="accent1"/>
+          </a:fillRef>
+          <a:effectRef idx="2">
+            <a:schemeClr val="accent1"/>
+          </a:effectRef>
+          <a:fontRef idx="minor">
+            <a:schemeClr val="lt1"/>
+          </a:fontRef>
+        </p:style>
+        <p:txBody>
+          <a:bodyPr rtlCol="0" anchor="ctr"/>
+          <a:lstStyle/>
+          <a:p>
+            <a:pPr algn="ctr">
+              <a:lnSpc>
+                <a:spcPct val="112000"/>
+              </a:lnSpc>
+              <a:spcBef>
+                <a:spcPts val="0"/>
+              </a:spcBef>
+              <a:spcAft>
+                <a:spcPts val="200"/>
+              </a:spcAft>
+            </a:pPr>
+            <a:r>
+              <a:rPr sz="1600" b="1" i="0">
+                <a:solidFill>
+                  <a:srgbClr val="121B15"/>
+                </a:solidFill>
+                <a:latin typeface="Calibri"/>
+              </a:rPr>
+              <a:t>Final Status: Demo Ready</a:t>
+            </a:r>
+          </a:p>
+        </p:txBody>
+      </p:sp>
+      <p:cxnSp>
+        <p:nvCxnSpPr>
+          <p:cNvPr id="25" name="Connector 24"/>
+          <p:cNvCxnSpPr/>
+          <p:nvPr/>
+        </p:nvCxnSpPr>
+        <p:spPr>
+          <a:xfrm>
+            <a:off x="658368" y="6355080"/>
+            <a:ext cx="10881360" cy="0"/>
+          </a:xfrm>
+          <a:prstGeom prst="line">
+            <a:avLst/>
+          </a:prstGeom>
+          <a:ln w="9525">
+            <a:solidFill>
+              <a:srgbClr val="D8DED8"/>
+            </a:solidFill>
+          </a:ln>
+        </p:spPr>
+        <p:style>
+          <a:lnRef idx="2">
+            <a:schemeClr val="accent1"/>
+          </a:lnRef>
+          <a:fillRef idx="0">
+            <a:schemeClr val="accent1"/>
+          </a:fillRef>
+          <a:effectRef idx="1">
+            <a:schemeClr val="accent1"/>
+          </a:effectRef>
+          <a:fontRef idx="minor">
+            <a:schemeClr val="tx1"/>
+          </a:fontRef>
+        </p:style>
+      </p:cxnSp>
+      <p:sp>
+        <p:nvSpPr>
+          <p:cNvPr id="26" name="TextBox 25"/>
+          <p:cNvSpPr txBox="1"/>
+          <p:nvPr/>
+        </p:nvSpPr>
+        <p:spPr>
+          <a:xfrm>
+            <a:off x="658368" y="6446520"/>
+            <a:ext cx="5486400" cy="274320"/>
+          </a:xfrm>
+          <a:prstGeom prst="rect">
+            <a:avLst/>
+          </a:prstGeom>
+          <a:noFill/>
+        </p:spPr>
+        <p:txBody>
+          <a:bodyPr wrap="square" lIns="0" rIns="0" tIns="0" bIns="0">
+            <a:spAutoFit/>
+          </a:bodyPr>
+          <a:lstStyle/>
+          <a:p>
+            <a:pPr algn="l">
+              <a:lnSpc>
+                <a:spcPct val="112000"/>
+              </a:lnSpc>
+              <a:spcBef>
+                <a:spcPts val="0"/>
+              </a:spcBef>
+              <a:spcAft>
+                <a:spcPts val="200"/>
+              </a:spcAft>
+            </a:pPr>
+            <a:r>
+              <a:rPr sz="1050" b="0" i="0">
+                <a:solidFill>
+                  <a:srgbClr val="8A968E"/>
+                </a:solidFill>
+                <a:latin typeface="Calibri"/>
+              </a:rPr>
+              <a:t>AgriAI 360 — Phase 2 Progress</a:t>
+            </a:r>
+          </a:p>
+        </p:txBody>
+      </p:sp>
+      <p:sp>
+        <p:nvSpPr>
+          <p:cNvPr id="27" name="TextBox 26"/>
+          <p:cNvSpPr txBox="1"/>
+          <p:nvPr/>
+        </p:nvSpPr>
+        <p:spPr>
+          <a:xfrm>
+            <a:off x="9601200" y="6446520"/>
+            <a:ext cx="1938528" cy="274320"/>
+          </a:xfrm>
+          <a:prstGeom prst="rect">
+            <a:avLst/>
+          </a:prstGeom>
+          <a:noFill/>
+        </p:spPr>
+        <p:txBody>
+          <a:bodyPr wrap="square" lIns="0" rIns="0" tIns="0" bIns="0">
+            <a:spAutoFit/>
+          </a:bodyPr>
+          <a:lstStyle/>
+          <a:p>
+            <a:pPr algn="r">
+              <a:lnSpc>
+                <a:spcPct val="112000"/>
+              </a:lnSpc>
+              <a:spcBef>
+                <a:spcPts val="0"/>
+              </a:spcBef>
+              <a:spcAft>
+                <a:spcPts val="200"/>
+              </a:spcAft>
+            </a:pPr>
+            <a:r>
+              <a:rPr sz="1050" b="0" i="0">
+                <a:solidFill>
+                  <a:srgbClr val="8A968E"/>
+                </a:solidFill>
+                <a:latin typeface="Calibri"/>
+              </a:rPr>
+              <a:t>19</a:t>
             </a:r>
           </a:p>
         </p:txBody>
@@ -15254,6 +16883,1158 @@
                 <a:latin typeface="Calibri"/>
               </a:rPr>
               <a:t>2</a:t>
+            </a:r>
+          </a:p>
+        </p:txBody>
+      </p:sp>
+    </p:spTree>
+  </p:cSld>
+  <p:clrMapOvr>
+    <a:masterClrMapping/>
+  </p:clrMapOvr>
+</p:sld>
+</file>
+
+<file path=ppt/slides/slide20.xml><?xml version="1.0" encoding="utf-8"?>
+<p:sld xmlns:a="http://schemas.openxmlformats.org/drawingml/2006/main" xmlns:p="http://schemas.openxmlformats.org/presentationml/2006/main" xmlns:r="http://schemas.openxmlformats.org/officeDocument/2006/relationships">
+  <p:cSld>
+    <p:spTree>
+      <p:nvGrpSpPr>
+        <p:cNvPr id="1" name=""/>
+        <p:cNvGrpSpPr/>
+        <p:nvPr/>
+      </p:nvGrpSpPr>
+      <p:grpSpPr/>
+      <p:sp>
+        <p:nvSpPr>
+          <p:cNvPr id="2" name="Rectangle 1"/>
+          <p:cNvSpPr/>
+          <p:nvPr/>
+        </p:nvSpPr>
+        <p:spPr>
+          <a:xfrm>
+            <a:off x="0" y="0"/>
+            <a:ext cx="12191695" cy="6858000"/>
+          </a:xfrm>
+          <a:prstGeom prst="rect">
+            <a:avLst/>
+          </a:prstGeom>
+          <a:solidFill>
+            <a:srgbClr val="0A1A13"/>
+          </a:solidFill>
+          <a:ln>
+            <a:noFill/>
+          </a:ln>
+          <a:effectLst/>
+        </p:spPr>
+        <p:style>
+          <a:lnRef idx="1">
+            <a:schemeClr val="accent1"/>
+          </a:lnRef>
+          <a:fillRef idx="3">
+            <a:schemeClr val="accent1"/>
+          </a:fillRef>
+          <a:effectRef idx="2">
+            <a:schemeClr val="accent1"/>
+          </a:effectRef>
+          <a:fontRef idx="minor">
+            <a:schemeClr val="lt1"/>
+          </a:fontRef>
+        </p:style>
+        <p:txBody>
+          <a:bodyPr rtlCol="0" anchor="ctr"/>
+          <a:lstStyle/>
+          <a:p>
+            <a:pPr algn="ctr"/>
+          </a:p>
+        </p:txBody>
+      </p:sp>
+      <p:sp>
+        <p:nvSpPr>
+          <p:cNvPr id="3" name="Oval 2"/>
+          <p:cNvSpPr/>
+          <p:nvPr/>
+        </p:nvSpPr>
+        <p:spPr>
+          <a:xfrm>
+            <a:off x="658368" y="475488"/>
+            <a:ext cx="82296" cy="82296"/>
+          </a:xfrm>
+          <a:prstGeom prst="ellipse">
+            <a:avLst/>
+          </a:prstGeom>
+          <a:solidFill>
+            <a:srgbClr val="66BB6A"/>
+          </a:solidFill>
+          <a:ln>
+            <a:noFill/>
+          </a:ln>
+          <a:effectLst/>
+        </p:spPr>
+        <p:style>
+          <a:lnRef idx="1">
+            <a:schemeClr val="accent1"/>
+          </a:lnRef>
+          <a:fillRef idx="3">
+            <a:schemeClr val="accent1"/>
+          </a:fillRef>
+          <a:effectRef idx="2">
+            <a:schemeClr val="accent1"/>
+          </a:effectRef>
+          <a:fontRef idx="minor">
+            <a:schemeClr val="lt1"/>
+          </a:fontRef>
+        </p:style>
+        <p:txBody>
+          <a:bodyPr rtlCol="0" anchor="ctr"/>
+          <a:lstStyle/>
+          <a:p>
+            <a:pPr algn="ctr"/>
+          </a:p>
+        </p:txBody>
+      </p:sp>
+      <p:sp>
+        <p:nvSpPr>
+          <p:cNvPr id="4" name="TextBox 3"/>
+          <p:cNvSpPr txBox="1"/>
+          <p:nvPr/>
+        </p:nvSpPr>
+        <p:spPr>
+          <a:xfrm>
+            <a:off x="841248" y="420624"/>
+            <a:ext cx="9144000" cy="274320"/>
+          </a:xfrm>
+          <a:prstGeom prst="rect">
+            <a:avLst/>
+          </a:prstGeom>
+          <a:noFill/>
+        </p:spPr>
+        <p:txBody>
+          <a:bodyPr wrap="square" lIns="0" rIns="0" tIns="0" bIns="0">
+            <a:spAutoFit/>
+          </a:bodyPr>
+          <a:lstStyle/>
+          <a:p>
+            <a:pPr algn="l">
+              <a:lnSpc>
+                <a:spcPct val="112000"/>
+              </a:lnSpc>
+              <a:spcBef>
+                <a:spcPts val="0"/>
+              </a:spcBef>
+              <a:spcAft>
+                <a:spcPts val="200"/>
+              </a:spcAft>
+            </a:pPr>
+            <a:r>
+              <a:rPr sz="1250" b="1" i="0">
+                <a:solidFill>
+                  <a:srgbClr val="66BB6A"/>
+                </a:solidFill>
+                <a:latin typeface="Calibri"/>
+              </a:rPr>
+              <a:t>CONCLUSION</a:t>
+            </a:r>
+          </a:p>
+        </p:txBody>
+      </p:sp>
+      <p:sp>
+        <p:nvSpPr>
+          <p:cNvPr id="5" name="TextBox 4"/>
+          <p:cNvSpPr txBox="1"/>
+          <p:nvPr/>
+        </p:nvSpPr>
+        <p:spPr>
+          <a:xfrm>
+            <a:off x="658368" y="713232"/>
+            <a:ext cx="10881360" cy="640080"/>
+          </a:xfrm>
+          <a:prstGeom prst="rect">
+            <a:avLst/>
+          </a:prstGeom>
+          <a:noFill/>
+        </p:spPr>
+        <p:txBody>
+          <a:bodyPr wrap="square" lIns="0" rIns="0" tIns="0" bIns="0">
+            <a:spAutoFit/>
+          </a:bodyPr>
+          <a:lstStyle/>
+          <a:p>
+            <a:pPr algn="l">
+              <a:lnSpc>
+                <a:spcPct val="112000"/>
+              </a:lnSpc>
+              <a:spcBef>
+                <a:spcPts val="0"/>
+              </a:spcBef>
+              <a:spcAft>
+                <a:spcPts val="200"/>
+              </a:spcAft>
+            </a:pPr>
+            <a:r>
+              <a:rPr sz="3200" b="1" i="0">
+                <a:solidFill>
+                  <a:srgbClr val="FFFFFF"/>
+                </a:solidFill>
+                <a:latin typeface="Calibri"/>
+              </a:rPr>
+              <a:t>Summary &amp; Path Forward</a:t>
+            </a:r>
+          </a:p>
+        </p:txBody>
+      </p:sp>
+      <p:sp>
+        <p:nvSpPr>
+          <p:cNvPr id="6" name="Rounded Rectangle 5"/>
+          <p:cNvSpPr/>
+          <p:nvPr/>
+        </p:nvSpPr>
+        <p:spPr>
+          <a:xfrm>
+            <a:off x="658368" y="1600200"/>
+            <a:ext cx="1022299" cy="685800"/>
+          </a:xfrm>
+          <a:prstGeom prst="roundRect">
+            <a:avLst>
+              <a:gd name="adj" fmla="val 35000"/>
+            </a:avLst>
+          </a:prstGeom>
+          <a:solidFill>
+            <a:srgbClr val="2E5A3C"/>
+          </a:solidFill>
+          <a:ln>
+            <a:noFill/>
+          </a:ln>
+          <a:effectLst/>
+        </p:spPr>
+        <p:style>
+          <a:lnRef idx="1">
+            <a:schemeClr val="accent1"/>
+          </a:lnRef>
+          <a:fillRef idx="3">
+            <a:schemeClr val="accent1"/>
+          </a:fillRef>
+          <a:effectRef idx="2">
+            <a:schemeClr val="accent1"/>
+          </a:effectRef>
+          <a:fontRef idx="minor">
+            <a:schemeClr val="lt1"/>
+          </a:fontRef>
+        </p:style>
+        <p:txBody>
+          <a:bodyPr rtlCol="0" anchor="ctr" wrap="square"/>
+          <a:lstStyle/>
+          <a:p>
+            <a:pPr algn="ctr">
+              <a:lnSpc>
+                <a:spcPct val="112000"/>
+              </a:lnSpc>
+              <a:spcBef>
+                <a:spcPts val="0"/>
+              </a:spcBef>
+              <a:spcAft>
+                <a:spcPts val="200"/>
+              </a:spcAft>
+            </a:pPr>
+            <a:r>
+              <a:rPr sz="950" b="1" i="0">
+                <a:solidFill>
+                  <a:srgbClr val="FFFFFF"/>
+                </a:solidFill>
+                <a:latin typeface="Calibri"/>
+              </a:rPr>
+              <a:t>Phase 1</a:t>
+            </a:r>
+          </a:p>
+        </p:txBody>
+      </p:sp>
+      <p:sp>
+        <p:nvSpPr>
+          <p:cNvPr id="7" name="Rounded Rectangle 6"/>
+          <p:cNvSpPr/>
+          <p:nvPr/>
+        </p:nvSpPr>
+        <p:spPr>
+          <a:xfrm>
+            <a:off x="1753819" y="1600200"/>
+            <a:ext cx="1022299" cy="685800"/>
+          </a:xfrm>
+          <a:prstGeom prst="roundRect">
+            <a:avLst>
+              <a:gd name="adj" fmla="val 35000"/>
+            </a:avLst>
+          </a:prstGeom>
+          <a:solidFill>
+            <a:srgbClr val="172F1F"/>
+          </a:solidFill>
+          <a:ln>
+            <a:noFill/>
+          </a:ln>
+          <a:effectLst/>
+        </p:spPr>
+        <p:style>
+          <a:lnRef idx="1">
+            <a:schemeClr val="accent1"/>
+          </a:lnRef>
+          <a:fillRef idx="3">
+            <a:schemeClr val="accent1"/>
+          </a:fillRef>
+          <a:effectRef idx="2">
+            <a:schemeClr val="accent1"/>
+          </a:effectRef>
+          <a:fontRef idx="minor">
+            <a:schemeClr val="lt1"/>
+          </a:fontRef>
+        </p:style>
+        <p:txBody>
+          <a:bodyPr rtlCol="0" anchor="ctr" wrap="square"/>
+          <a:lstStyle/>
+          <a:p>
+            <a:pPr algn="ctr">
+              <a:lnSpc>
+                <a:spcPct val="112000"/>
+              </a:lnSpc>
+              <a:spcBef>
+                <a:spcPts val="0"/>
+              </a:spcBef>
+              <a:spcAft>
+                <a:spcPts val="200"/>
+              </a:spcAft>
+            </a:pPr>
+            <a:r>
+              <a:rPr sz="950" b="1" i="0">
+                <a:solidFill>
+                  <a:srgbClr val="FFFFFF"/>
+                </a:solidFill>
+                <a:latin typeface="Calibri"/>
+              </a:rPr>
+              <a:t>Recommendation</a:t>
+            </a:r>
+          </a:p>
+        </p:txBody>
+      </p:sp>
+      <p:sp>
+        <p:nvSpPr>
+          <p:cNvPr id="8" name="Rounded Rectangle 7"/>
+          <p:cNvSpPr/>
+          <p:nvPr/>
+        </p:nvSpPr>
+        <p:spPr>
+          <a:xfrm>
+            <a:off x="2849270" y="1600200"/>
+            <a:ext cx="1022299" cy="685800"/>
+          </a:xfrm>
+          <a:prstGeom prst="roundRect">
+            <a:avLst>
+              <a:gd name="adj" fmla="val 35000"/>
+            </a:avLst>
+          </a:prstGeom>
+          <a:solidFill>
+            <a:srgbClr val="172F1F"/>
+          </a:solidFill>
+          <a:ln>
+            <a:noFill/>
+          </a:ln>
+          <a:effectLst/>
+        </p:spPr>
+        <p:style>
+          <a:lnRef idx="1">
+            <a:schemeClr val="accent1"/>
+          </a:lnRef>
+          <a:fillRef idx="3">
+            <a:schemeClr val="accent1"/>
+          </a:fillRef>
+          <a:effectRef idx="2">
+            <a:schemeClr val="accent1"/>
+          </a:effectRef>
+          <a:fontRef idx="minor">
+            <a:schemeClr val="lt1"/>
+          </a:fontRef>
+        </p:style>
+        <p:txBody>
+          <a:bodyPr rtlCol="0" anchor="ctr" wrap="square"/>
+          <a:lstStyle/>
+          <a:p>
+            <a:pPr algn="ctr">
+              <a:lnSpc>
+                <a:spcPct val="112000"/>
+              </a:lnSpc>
+              <a:spcBef>
+                <a:spcPts val="0"/>
+              </a:spcBef>
+              <a:spcAft>
+                <a:spcPts val="200"/>
+              </a:spcAft>
+            </a:pPr>
+            <a:r>
+              <a:rPr sz="950" b="1" i="0">
+                <a:solidFill>
+                  <a:srgbClr val="FFFFFF"/>
+                </a:solidFill>
+                <a:latin typeface="Calibri"/>
+              </a:rPr>
+              <a:t>Yield &amp; Profit</a:t>
+            </a:r>
+          </a:p>
+        </p:txBody>
+      </p:sp>
+      <p:sp>
+        <p:nvSpPr>
+          <p:cNvPr id="9" name="Rounded Rectangle 8"/>
+          <p:cNvSpPr/>
+          <p:nvPr/>
+        </p:nvSpPr>
+        <p:spPr>
+          <a:xfrm>
+            <a:off x="3944721" y="1600200"/>
+            <a:ext cx="1022299" cy="685800"/>
+          </a:xfrm>
+          <a:prstGeom prst="roundRect">
+            <a:avLst>
+              <a:gd name="adj" fmla="val 35000"/>
+            </a:avLst>
+          </a:prstGeom>
+          <a:solidFill>
+            <a:srgbClr val="172F1F"/>
+          </a:solidFill>
+          <a:ln>
+            <a:noFill/>
+          </a:ln>
+          <a:effectLst/>
+        </p:spPr>
+        <p:style>
+          <a:lnRef idx="1">
+            <a:schemeClr val="accent1"/>
+          </a:lnRef>
+          <a:fillRef idx="3">
+            <a:schemeClr val="accent1"/>
+          </a:fillRef>
+          <a:effectRef idx="2">
+            <a:schemeClr val="accent1"/>
+          </a:effectRef>
+          <a:fontRef idx="minor">
+            <a:schemeClr val="lt1"/>
+          </a:fontRef>
+        </p:style>
+        <p:txBody>
+          <a:bodyPr rtlCol="0" anchor="ctr" wrap="square"/>
+          <a:lstStyle/>
+          <a:p>
+            <a:pPr algn="ctr">
+              <a:lnSpc>
+                <a:spcPct val="112000"/>
+              </a:lnSpc>
+              <a:spcBef>
+                <a:spcPts val="0"/>
+              </a:spcBef>
+              <a:spcAft>
+                <a:spcPts val="200"/>
+              </a:spcAft>
+            </a:pPr>
+            <a:r>
+              <a:rPr sz="950" b="1" i="0">
+                <a:solidFill>
+                  <a:srgbClr val="FFFFFF"/>
+                </a:solidFill>
+                <a:latin typeface="Calibri"/>
+              </a:rPr>
+              <a:t>Water &amp; Risk</a:t>
+            </a:r>
+          </a:p>
+        </p:txBody>
+      </p:sp>
+      <p:sp>
+        <p:nvSpPr>
+          <p:cNvPr id="10" name="Rounded Rectangle 9"/>
+          <p:cNvSpPr/>
+          <p:nvPr/>
+        </p:nvSpPr>
+        <p:spPr>
+          <a:xfrm>
+            <a:off x="5040172" y="1600200"/>
+            <a:ext cx="1022299" cy="685800"/>
+          </a:xfrm>
+          <a:prstGeom prst="roundRect">
+            <a:avLst>
+              <a:gd name="adj" fmla="val 35000"/>
+            </a:avLst>
+          </a:prstGeom>
+          <a:solidFill>
+            <a:srgbClr val="172F1F"/>
+          </a:solidFill>
+          <a:ln>
+            <a:noFill/>
+          </a:ln>
+          <a:effectLst/>
+        </p:spPr>
+        <p:style>
+          <a:lnRef idx="1">
+            <a:schemeClr val="accent1"/>
+          </a:lnRef>
+          <a:fillRef idx="3">
+            <a:schemeClr val="accent1"/>
+          </a:fillRef>
+          <a:effectRef idx="2">
+            <a:schemeClr val="accent1"/>
+          </a:effectRef>
+          <a:fontRef idx="minor">
+            <a:schemeClr val="lt1"/>
+          </a:fontRef>
+        </p:style>
+        <p:txBody>
+          <a:bodyPr rtlCol="0" anchor="ctr" wrap="square"/>
+          <a:lstStyle/>
+          <a:p>
+            <a:pPr algn="ctr">
+              <a:lnSpc>
+                <a:spcPct val="112000"/>
+              </a:lnSpc>
+              <a:spcBef>
+                <a:spcPts val="0"/>
+              </a:spcBef>
+              <a:spcAft>
+                <a:spcPts val="200"/>
+              </a:spcAft>
+            </a:pPr>
+            <a:r>
+              <a:rPr sz="950" b="1" i="0">
+                <a:solidFill>
+                  <a:srgbClr val="FFFFFF"/>
+                </a:solidFill>
+                <a:latin typeface="Calibri"/>
+              </a:rPr>
+              <a:t>Disease Detection</a:t>
+            </a:r>
+          </a:p>
+        </p:txBody>
+      </p:sp>
+      <p:sp>
+        <p:nvSpPr>
+          <p:cNvPr id="11" name="Rounded Rectangle 10"/>
+          <p:cNvSpPr/>
+          <p:nvPr/>
+        </p:nvSpPr>
+        <p:spPr>
+          <a:xfrm>
+            <a:off x="6135624" y="1600200"/>
+            <a:ext cx="1022299" cy="685800"/>
+          </a:xfrm>
+          <a:prstGeom prst="roundRect">
+            <a:avLst>
+              <a:gd name="adj" fmla="val 35000"/>
+            </a:avLst>
+          </a:prstGeom>
+          <a:solidFill>
+            <a:srgbClr val="172F1F"/>
+          </a:solidFill>
+          <a:ln>
+            <a:noFill/>
+          </a:ln>
+          <a:effectLst/>
+        </p:spPr>
+        <p:style>
+          <a:lnRef idx="1">
+            <a:schemeClr val="accent1"/>
+          </a:lnRef>
+          <a:fillRef idx="3">
+            <a:schemeClr val="accent1"/>
+          </a:fillRef>
+          <a:effectRef idx="2">
+            <a:schemeClr val="accent1"/>
+          </a:effectRef>
+          <a:fontRef idx="minor">
+            <a:schemeClr val="lt1"/>
+          </a:fontRef>
+        </p:style>
+        <p:txBody>
+          <a:bodyPr rtlCol="0" anchor="ctr" wrap="square"/>
+          <a:lstStyle/>
+          <a:p>
+            <a:pPr algn="ctr">
+              <a:lnSpc>
+                <a:spcPct val="112000"/>
+              </a:lnSpc>
+              <a:spcBef>
+                <a:spcPts val="0"/>
+              </a:spcBef>
+              <a:spcAft>
+                <a:spcPts val="200"/>
+              </a:spcAft>
+            </a:pPr>
+            <a:r>
+              <a:rPr sz="950" b="1" i="0">
+                <a:solidFill>
+                  <a:srgbClr val="FFFFFF"/>
+                </a:solidFill>
+                <a:latin typeface="Calibri"/>
+              </a:rPr>
+              <a:t>Fertilizer &amp; Market</a:t>
+            </a:r>
+          </a:p>
+        </p:txBody>
+      </p:sp>
+      <p:sp>
+        <p:nvSpPr>
+          <p:cNvPr id="12" name="Rounded Rectangle 11"/>
+          <p:cNvSpPr/>
+          <p:nvPr/>
+        </p:nvSpPr>
+        <p:spPr>
+          <a:xfrm>
+            <a:off x="7231075" y="1600200"/>
+            <a:ext cx="1022299" cy="685800"/>
+          </a:xfrm>
+          <a:prstGeom prst="roundRect">
+            <a:avLst>
+              <a:gd name="adj" fmla="val 35000"/>
+            </a:avLst>
+          </a:prstGeom>
+          <a:solidFill>
+            <a:srgbClr val="172F1F"/>
+          </a:solidFill>
+          <a:ln>
+            <a:noFill/>
+          </a:ln>
+          <a:effectLst/>
+        </p:spPr>
+        <p:style>
+          <a:lnRef idx="1">
+            <a:schemeClr val="accent1"/>
+          </a:lnRef>
+          <a:fillRef idx="3">
+            <a:schemeClr val="accent1"/>
+          </a:fillRef>
+          <a:effectRef idx="2">
+            <a:schemeClr val="accent1"/>
+          </a:effectRef>
+          <a:fontRef idx="minor">
+            <a:schemeClr val="lt1"/>
+          </a:fontRef>
+        </p:style>
+        <p:txBody>
+          <a:bodyPr rtlCol="0" anchor="ctr" wrap="square"/>
+          <a:lstStyle/>
+          <a:p>
+            <a:pPr algn="ctr">
+              <a:lnSpc>
+                <a:spcPct val="112000"/>
+              </a:lnSpc>
+              <a:spcBef>
+                <a:spcPts val="0"/>
+              </a:spcBef>
+              <a:spcAft>
+                <a:spcPts val="200"/>
+              </a:spcAft>
+            </a:pPr>
+            <a:r>
+              <a:rPr sz="950" b="1" i="0">
+                <a:solidFill>
+                  <a:srgbClr val="FFFFFF"/>
+                </a:solidFill>
+                <a:latin typeface="Calibri"/>
+              </a:rPr>
+              <a:t>Notifications</a:t>
+            </a:r>
+          </a:p>
+        </p:txBody>
+      </p:sp>
+      <p:sp>
+        <p:nvSpPr>
+          <p:cNvPr id="13" name="Rounded Rectangle 12"/>
+          <p:cNvSpPr/>
+          <p:nvPr/>
+        </p:nvSpPr>
+        <p:spPr>
+          <a:xfrm>
+            <a:off x="8326526" y="1600200"/>
+            <a:ext cx="1022299" cy="685800"/>
+          </a:xfrm>
+          <a:prstGeom prst="roundRect">
+            <a:avLst>
+              <a:gd name="adj" fmla="val 35000"/>
+            </a:avLst>
+          </a:prstGeom>
+          <a:solidFill>
+            <a:srgbClr val="172F1F"/>
+          </a:solidFill>
+          <a:ln>
+            <a:noFill/>
+          </a:ln>
+          <a:effectLst/>
+        </p:spPr>
+        <p:style>
+          <a:lnRef idx="1">
+            <a:schemeClr val="accent1"/>
+          </a:lnRef>
+          <a:fillRef idx="3">
+            <a:schemeClr val="accent1"/>
+          </a:fillRef>
+          <a:effectRef idx="2">
+            <a:schemeClr val="accent1"/>
+          </a:effectRef>
+          <a:fontRef idx="minor">
+            <a:schemeClr val="lt1"/>
+          </a:fontRef>
+        </p:style>
+        <p:txBody>
+          <a:bodyPr rtlCol="0" anchor="ctr" wrap="square"/>
+          <a:lstStyle/>
+          <a:p>
+            <a:pPr algn="ctr">
+              <a:lnSpc>
+                <a:spcPct val="112000"/>
+              </a:lnSpc>
+              <a:spcBef>
+                <a:spcPts val="0"/>
+              </a:spcBef>
+              <a:spcAft>
+                <a:spcPts val="200"/>
+              </a:spcAft>
+            </a:pPr>
+            <a:r>
+              <a:rPr sz="950" b="1" i="0">
+                <a:solidFill>
+                  <a:srgbClr val="FFFFFF"/>
+                </a:solidFill>
+                <a:latin typeface="Calibri"/>
+              </a:rPr>
+              <a:t>AI Assistant</a:t>
+            </a:r>
+          </a:p>
+        </p:txBody>
+      </p:sp>
+      <p:sp>
+        <p:nvSpPr>
+          <p:cNvPr id="14" name="Rounded Rectangle 13"/>
+          <p:cNvSpPr/>
+          <p:nvPr/>
+        </p:nvSpPr>
+        <p:spPr>
+          <a:xfrm>
+            <a:off x="9421977" y="1600200"/>
+            <a:ext cx="1022299" cy="685800"/>
+          </a:xfrm>
+          <a:prstGeom prst="roundRect">
+            <a:avLst>
+              <a:gd name="adj" fmla="val 35000"/>
+            </a:avLst>
+          </a:prstGeom>
+          <a:solidFill>
+            <a:srgbClr val="172F1F"/>
+          </a:solidFill>
+          <a:ln>
+            <a:noFill/>
+          </a:ln>
+          <a:effectLst/>
+        </p:spPr>
+        <p:style>
+          <a:lnRef idx="1">
+            <a:schemeClr val="accent1"/>
+          </a:lnRef>
+          <a:fillRef idx="3">
+            <a:schemeClr val="accent1"/>
+          </a:fillRef>
+          <a:effectRef idx="2">
+            <a:schemeClr val="accent1"/>
+          </a:effectRef>
+          <a:fontRef idx="minor">
+            <a:schemeClr val="lt1"/>
+          </a:fontRef>
+        </p:style>
+        <p:txBody>
+          <a:bodyPr rtlCol="0" anchor="ctr" wrap="square"/>
+          <a:lstStyle/>
+          <a:p>
+            <a:pPr algn="ctr">
+              <a:lnSpc>
+                <a:spcPct val="112000"/>
+              </a:lnSpc>
+              <a:spcBef>
+                <a:spcPts val="0"/>
+              </a:spcBef>
+              <a:spcAft>
+                <a:spcPts val="200"/>
+              </a:spcAft>
+            </a:pPr>
+            <a:r>
+              <a:rPr sz="950" b="1" i="0">
+                <a:solidFill>
+                  <a:srgbClr val="FFFFFF"/>
+                </a:solidFill>
+                <a:latin typeface="Calibri"/>
+              </a:rPr>
+              <a:t>Real-Time</a:t>
+            </a:r>
+          </a:p>
+        </p:txBody>
+      </p:sp>
+      <p:sp>
+        <p:nvSpPr>
+          <p:cNvPr id="15" name="Rounded Rectangle 14"/>
+          <p:cNvSpPr/>
+          <p:nvPr/>
+        </p:nvSpPr>
+        <p:spPr>
+          <a:xfrm>
+            <a:off x="10517428" y="1600200"/>
+            <a:ext cx="1022299" cy="685800"/>
+          </a:xfrm>
+          <a:prstGeom prst="roundRect">
+            <a:avLst>
+              <a:gd name="adj" fmla="val 35000"/>
+            </a:avLst>
+          </a:prstGeom>
+          <a:solidFill>
+            <a:srgbClr val="2E5A3C"/>
+          </a:solidFill>
+          <a:ln>
+            <a:noFill/>
+          </a:ln>
+          <a:effectLst/>
+        </p:spPr>
+        <p:style>
+          <a:lnRef idx="1">
+            <a:schemeClr val="accent1"/>
+          </a:lnRef>
+          <a:fillRef idx="3">
+            <a:schemeClr val="accent1"/>
+          </a:fillRef>
+          <a:effectRef idx="2">
+            <a:schemeClr val="accent1"/>
+          </a:effectRef>
+          <a:fontRef idx="minor">
+            <a:schemeClr val="lt1"/>
+          </a:fontRef>
+        </p:style>
+        <p:txBody>
+          <a:bodyPr rtlCol="0" anchor="ctr" wrap="square"/>
+          <a:lstStyle/>
+          <a:p>
+            <a:pPr algn="ctr">
+              <a:lnSpc>
+                <a:spcPct val="112000"/>
+              </a:lnSpc>
+              <a:spcBef>
+                <a:spcPts val="0"/>
+              </a:spcBef>
+              <a:spcAft>
+                <a:spcPts val="200"/>
+              </a:spcAft>
+            </a:pPr>
+            <a:r>
+              <a:rPr sz="950" b="1" i="0">
+                <a:solidFill>
+                  <a:srgbClr val="FFFFFF"/>
+                </a:solidFill>
+                <a:latin typeface="Calibri"/>
+              </a:rPr>
+              <a:t>Future Scope</a:t>
+            </a:r>
+          </a:p>
+        </p:txBody>
+      </p:sp>
+      <p:sp>
+        <p:nvSpPr>
+          <p:cNvPr id="16" name="TextBox 15"/>
+          <p:cNvSpPr txBox="1"/>
+          <p:nvPr/>
+        </p:nvSpPr>
+        <p:spPr>
+          <a:xfrm>
+            <a:off x="658368" y="2606040"/>
+            <a:ext cx="10881360" cy="1097280"/>
+          </a:xfrm>
+          <a:prstGeom prst="rect">
+            <a:avLst/>
+          </a:prstGeom>
+          <a:noFill/>
+        </p:spPr>
+        <p:txBody>
+          <a:bodyPr wrap="square" lIns="0" rIns="0" tIns="0" bIns="0">
+            <a:spAutoFit/>
+          </a:bodyPr>
+          <a:lstStyle/>
+          <a:p>
+            <a:pPr algn="l">
+              <a:lnSpc>
+                <a:spcPct val="112000"/>
+              </a:lnSpc>
+              <a:spcBef>
+                <a:spcPts val="0"/>
+              </a:spcBef>
+              <a:spcAft>
+                <a:spcPts val="200"/>
+              </a:spcAft>
+            </a:pPr>
+            <a:r>
+              <a:rPr sz="1350" b="0" i="0">
+                <a:solidFill>
+                  <a:srgbClr val="AFC4B6"/>
+                </a:solidFill>
+                <a:latin typeface="Calibri"/>
+              </a:rPr>
+              <a:t>AgriAI 360 has grown from a single explainable recommendation engine into a ten-module farm decision-support platform — nine implemented and verified end-to-end, one (Real-Time Agri Intelligence) partially delivered with Satellite/NDVI honestly left as future scope. Each module is trained, formula-verified, rule-based on real data, or built on real government/scientific data — and each one honest about what it doesn't yet know.</a:t>
+            </a:r>
+          </a:p>
+        </p:txBody>
+      </p:sp>
+      <p:sp>
+        <p:nvSpPr>
+          <p:cNvPr id="17" name="Rounded Rectangle 16"/>
+          <p:cNvSpPr/>
+          <p:nvPr/>
+        </p:nvSpPr>
+        <p:spPr>
+          <a:xfrm>
+            <a:off x="658368" y="3794760"/>
+            <a:ext cx="10881360" cy="1737360"/>
+          </a:xfrm>
+          <a:prstGeom prst="roundRect">
+            <a:avLst>
+              <a:gd name="adj" fmla="val 6000"/>
+            </a:avLst>
+          </a:prstGeom>
+          <a:solidFill>
+            <a:srgbClr val="172F1F"/>
+          </a:solidFill>
+          <a:ln>
+            <a:noFill/>
+          </a:ln>
+          <a:effectLst/>
+        </p:spPr>
+        <p:style>
+          <a:lnRef idx="1">
+            <a:schemeClr val="accent1"/>
+          </a:lnRef>
+          <a:fillRef idx="3">
+            <a:schemeClr val="accent1"/>
+          </a:fillRef>
+          <a:effectRef idx="2">
+            <a:schemeClr val="accent1"/>
+          </a:effectRef>
+          <a:fontRef idx="minor">
+            <a:schemeClr val="lt1"/>
+          </a:fontRef>
+        </p:style>
+        <p:txBody>
+          <a:bodyPr rtlCol="0" anchor="ctr"/>
+          <a:lstStyle/>
+          <a:p>
+            <a:pPr algn="ctr"/>
+          </a:p>
+        </p:txBody>
+      </p:sp>
+      <p:sp>
+        <p:nvSpPr>
+          <p:cNvPr id="18" name="TextBox 17"/>
+          <p:cNvSpPr txBox="1"/>
+          <p:nvPr/>
+        </p:nvSpPr>
+        <p:spPr>
+          <a:xfrm>
+            <a:off x="859536" y="3995928"/>
+            <a:ext cx="10479024" cy="274320"/>
+          </a:xfrm>
+          <a:prstGeom prst="rect">
+            <a:avLst/>
+          </a:prstGeom>
+          <a:noFill/>
+        </p:spPr>
+        <p:txBody>
+          <a:bodyPr wrap="square" lIns="0" rIns="0" tIns="0" bIns="0">
+            <a:spAutoFit/>
+          </a:bodyPr>
+          <a:lstStyle/>
+          <a:p>
+            <a:pPr algn="l">
+              <a:lnSpc>
+                <a:spcPct val="112000"/>
+              </a:lnSpc>
+              <a:spcBef>
+                <a:spcPts val="0"/>
+              </a:spcBef>
+              <a:spcAft>
+                <a:spcPts val="200"/>
+              </a:spcAft>
+            </a:pPr>
+            <a:r>
+              <a:rPr sz="1250" b="1" i="0">
+                <a:solidFill>
+                  <a:srgbClr val="66BB6A"/>
+                </a:solidFill>
+                <a:latin typeface="Calibri"/>
+              </a:rPr>
+              <a:t>REFERENCES</a:t>
+            </a:r>
+          </a:p>
+        </p:txBody>
+      </p:sp>
+      <p:sp>
+        <p:nvSpPr>
+          <p:cNvPr id="19" name="TextBox 18"/>
+          <p:cNvSpPr txBox="1"/>
+          <p:nvPr/>
+        </p:nvSpPr>
+        <p:spPr>
+          <a:xfrm>
+            <a:off x="859536" y="4343400"/>
+            <a:ext cx="10479024" cy="987552"/>
+          </a:xfrm>
+          <a:prstGeom prst="rect">
+            <a:avLst/>
+          </a:prstGeom>
+          <a:noFill/>
+        </p:spPr>
+        <p:txBody>
+          <a:bodyPr wrap="square" lIns="0" rIns="0" tIns="0" bIns="0">
+            <a:spAutoFit/>
+          </a:bodyPr>
+          <a:lstStyle/>
+          <a:p>
+            <a:pPr algn="l">
+              <a:lnSpc>
+                <a:spcPct val="112000"/>
+              </a:lnSpc>
+              <a:spcBef>
+                <a:spcPts val="0"/>
+              </a:spcBef>
+              <a:spcAft>
+                <a:spcPts val="200"/>
+              </a:spcAft>
+            </a:pPr>
+            <a:r>
+              <a:rPr sz="1200" b="0" i="0">
+                <a:solidFill>
+                  <a:srgbClr val="AFC4B6"/>
+                </a:solidFill>
+                <a:latin typeface="Calibri"/>
+              </a:rPr>
+              <a:t>Full reference list: 20 literature-review papers (Phase 1, slides 7-10) + project documentation (docs/dataset.md, docs/ml-methodology.md, docs/architecture.md, docs/future-scope.md) + each module's own train.py / service file + models/*_metrics.json + models/market_price_report.json + this session's code audit (backend test suite: 559/559 passing) and live end-to-end HTTP smoke test.</a:t>
+            </a:r>
+          </a:p>
+        </p:txBody>
+      </p:sp>
+      <p:cxnSp>
+        <p:nvCxnSpPr>
+          <p:cNvPr id="20" name="Connector 19"/>
+          <p:cNvCxnSpPr/>
+          <p:nvPr/>
+        </p:nvCxnSpPr>
+        <p:spPr>
+          <a:xfrm>
+            <a:off x="658368" y="6355080"/>
+            <a:ext cx="10881360" cy="0"/>
+          </a:xfrm>
+          <a:prstGeom prst="line">
+            <a:avLst/>
+          </a:prstGeom>
+          <a:ln w="9525">
+            <a:solidFill>
+              <a:srgbClr val="2A3A32"/>
+            </a:solidFill>
+          </a:ln>
+        </p:spPr>
+        <p:style>
+          <a:lnRef idx="2">
+            <a:schemeClr val="accent1"/>
+          </a:lnRef>
+          <a:fillRef idx="0">
+            <a:schemeClr val="accent1"/>
+          </a:fillRef>
+          <a:effectRef idx="1">
+            <a:schemeClr val="accent1"/>
+          </a:effectRef>
+          <a:fontRef idx="minor">
+            <a:schemeClr val="tx1"/>
+          </a:fontRef>
+        </p:style>
+      </p:cxnSp>
+      <p:sp>
+        <p:nvSpPr>
+          <p:cNvPr id="21" name="TextBox 20"/>
+          <p:cNvSpPr txBox="1"/>
+          <p:nvPr/>
+        </p:nvSpPr>
+        <p:spPr>
+          <a:xfrm>
+            <a:off x="658368" y="6446520"/>
+            <a:ext cx="5486400" cy="274320"/>
+          </a:xfrm>
+          <a:prstGeom prst="rect">
+            <a:avLst/>
+          </a:prstGeom>
+          <a:noFill/>
+        </p:spPr>
+        <p:txBody>
+          <a:bodyPr wrap="square" lIns="0" rIns="0" tIns="0" bIns="0">
+            <a:spAutoFit/>
+          </a:bodyPr>
+          <a:lstStyle/>
+          <a:p>
+            <a:pPr algn="l">
+              <a:lnSpc>
+                <a:spcPct val="112000"/>
+              </a:lnSpc>
+              <a:spcBef>
+                <a:spcPts val="0"/>
+              </a:spcBef>
+              <a:spcAft>
+                <a:spcPts val="200"/>
+              </a:spcAft>
+            </a:pPr>
+            <a:r>
+              <a:rPr sz="1050" b="0" i="0">
+                <a:solidFill>
+                  <a:srgbClr val="AFC4B6"/>
+                </a:solidFill>
+                <a:latin typeface="Calibri"/>
+              </a:rPr>
+              <a:t>AgriAI 360 — Phase 2 Progress</a:t>
+            </a:r>
+          </a:p>
+        </p:txBody>
+      </p:sp>
+      <p:sp>
+        <p:nvSpPr>
+          <p:cNvPr id="22" name="TextBox 21"/>
+          <p:cNvSpPr txBox="1"/>
+          <p:nvPr/>
+        </p:nvSpPr>
+        <p:spPr>
+          <a:xfrm>
+            <a:off x="9601200" y="6446520"/>
+            <a:ext cx="1938528" cy="274320"/>
+          </a:xfrm>
+          <a:prstGeom prst="rect">
+            <a:avLst/>
+          </a:prstGeom>
+          <a:noFill/>
+        </p:spPr>
+        <p:txBody>
+          <a:bodyPr wrap="square" lIns="0" rIns="0" tIns="0" bIns="0">
+            <a:spAutoFit/>
+          </a:bodyPr>
+          <a:lstStyle/>
+          <a:p>
+            <a:pPr algn="r">
+              <a:lnSpc>
+                <a:spcPct val="112000"/>
+              </a:lnSpc>
+              <a:spcBef>
+                <a:spcPts val="0"/>
+              </a:spcBef>
+              <a:spcAft>
+                <a:spcPts val="200"/>
+              </a:spcAft>
+            </a:pPr>
+            <a:r>
+              <a:rPr sz="1050" b="0" i="0">
+                <a:solidFill>
+                  <a:srgbClr val="AFC4B6"/>
+                </a:solidFill>
+                <a:latin typeface="Calibri"/>
+              </a:rPr>
+              <a:t>20</a:t>
             </a:r>
           </a:p>
         </p:txBody>
